--- a/8-5-2025.pptx
+++ b/8-5-2025.pptx
@@ -5,10 +5,10 @@
     <p:sldMasterId id="2147483668" r:id="rId4"/>
   </p:sldMasterIdLst>
   <p:notesMasterIdLst>
-    <p:notesMasterId r:id="rId18"/>
+    <p:notesMasterId r:id="rId44"/>
   </p:notesMasterIdLst>
   <p:handoutMasterIdLst>
-    <p:handoutMasterId r:id="rId19"/>
+    <p:handoutMasterId r:id="rId45"/>
   </p:handoutMasterIdLst>
   <p:sldIdLst>
     <p:sldId id="256" r:id="rId5"/>
@@ -24,6 +24,32 @@
     <p:sldId id="263" r:id="rId15"/>
     <p:sldId id="265" r:id="rId16"/>
     <p:sldId id="264" r:id="rId17"/>
+    <p:sldId id="269" r:id="rId18"/>
+    <p:sldId id="270" r:id="rId19"/>
+    <p:sldId id="271" r:id="rId20"/>
+    <p:sldId id="272" r:id="rId21"/>
+    <p:sldId id="273" r:id="rId22"/>
+    <p:sldId id="274" r:id="rId23"/>
+    <p:sldId id="275" r:id="rId24"/>
+    <p:sldId id="276" r:id="rId25"/>
+    <p:sldId id="277" r:id="rId26"/>
+    <p:sldId id="278" r:id="rId27"/>
+    <p:sldId id="279" r:id="rId28"/>
+    <p:sldId id="280" r:id="rId29"/>
+    <p:sldId id="282" r:id="rId30"/>
+    <p:sldId id="283" r:id="rId31"/>
+    <p:sldId id="284" r:id="rId32"/>
+    <p:sldId id="281" r:id="rId33"/>
+    <p:sldId id="285" r:id="rId34"/>
+    <p:sldId id="286" r:id="rId35"/>
+    <p:sldId id="287" r:id="rId36"/>
+    <p:sldId id="288" r:id="rId37"/>
+    <p:sldId id="289" r:id="rId38"/>
+    <p:sldId id="291" r:id="rId39"/>
+    <p:sldId id="290" r:id="rId40"/>
+    <p:sldId id="292" r:id="rId41"/>
+    <p:sldId id="293" r:id="rId42"/>
+    <p:sldId id="294" r:id="rId43"/>
   </p:sldIdLst>
   <p:sldSz cx="12192000" cy="6858000"/>
   <p:notesSz cx="6858000" cy="9144000"/>
@@ -226,7 +252,7 @@
           <a:p>
             <a:fld id="{630E4E57-1CF6-4440-8310-3CBE926400C3}" type="datetimeFigureOut">
               <a:rPr lang="en-US" smtClean="0"/>
-              <a:t>8/4/2025</a:t>
+              <a:t>8/16/2025</a:t>
             </a:fld>
             <a:endParaRPr lang="en-US"/>
           </a:p>
@@ -391,7 +417,7 @@
           <a:p>
             <a:fld id="{4B78E97C-1779-4CEE-80D0-5BBB1AC4023D}" type="datetimeFigureOut">
               <a:rPr lang="en-US" smtClean="0"/>
-              <a:t>8/4/2025</a:t>
+              <a:t>8/16/2025</a:t>
             </a:fld>
             <a:endParaRPr lang="en-US"/>
           </a:p>
@@ -859,7 +885,7 @@
             <a:fld id="{A318C6E2-4AA5-436E-9815-715E9B2235FA}" type="datetime1">
               <a:rPr lang="en-US" smtClean="0"/>
               <a:pPr/>
-              <a:t>8/4/2025</a:t>
+              <a:t>8/16/2025</a:t>
             </a:fld>
             <a:endParaRPr lang="en-US" dirty="0"/>
           </a:p>
@@ -1663,7 +1689,7 @@
           <a:p>
             <a:fld id="{C17F432B-3FBE-4889-963D-BF97BFBB7D3F}" type="datetime1">
               <a:rPr lang="en-US" smtClean="0"/>
-              <a:t>8/4/2025</a:t>
+              <a:t>8/16/2025</a:t>
             </a:fld>
             <a:endParaRPr lang="en-US" dirty="0"/>
           </a:p>
@@ -1796,7 +1822,7 @@
           <a:p>
             <a:fld id="{310CCC04-1E76-41EE-A8AC-75AD85313D09}" type="datetime1">
               <a:rPr lang="en-US" smtClean="0"/>
-              <a:t>8/4/2025</a:t>
+              <a:t>8/16/2025</a:t>
             </a:fld>
             <a:endParaRPr lang="en-US" dirty="0"/>
           </a:p>
@@ -1902,7 +1928,7 @@
           <a:p>
             <a:fld id="{83974A9E-84AC-4661-9381-CC35B09E47F7}" type="datetime1">
               <a:rPr lang="en-US" smtClean="0"/>
-              <a:t>8/4/2025</a:t>
+              <a:t>8/16/2025</a:t>
             </a:fld>
             <a:endParaRPr lang="en-US" dirty="0"/>
           </a:p>
@@ -2014,7 +2040,7 @@
           <a:p>
             <a:fld id="{1E55829F-8847-4C2A-8DD0-690EAD78E53F}" type="datetime1">
               <a:rPr lang="en-US" smtClean="0"/>
-              <a:t>8/4/2025</a:t>
+              <a:t>8/16/2025</a:t>
             </a:fld>
             <a:endParaRPr lang="en-US" dirty="0"/>
           </a:p>
@@ -2451,7 +2477,7 @@
           <a:p>
             <a:fld id="{5FDFC970-B950-4395-A833-47227D4A68CA}" type="datetime1">
               <a:rPr lang="en-US" smtClean="0"/>
-              <a:t>8/4/2025</a:t>
+              <a:t>8/16/2025</a:t>
             </a:fld>
             <a:endParaRPr lang="en-US" dirty="0"/>
           </a:p>
@@ -3110,7 +3136,7 @@
           <a:p>
             <a:fld id="{5FDFC970-B950-4395-A833-47227D4A68CA}" type="datetime1">
               <a:rPr lang="en-US" smtClean="0"/>
-              <a:t>8/4/2025</a:t>
+              <a:t>8/16/2025</a:t>
             </a:fld>
             <a:endParaRPr lang="en-US" dirty="0"/>
           </a:p>
@@ -3796,7 +3822,7 @@
           <a:p>
             <a:fld id="{5FDFC970-B950-4395-A833-47227D4A68CA}" type="datetime1">
               <a:rPr lang="en-US" smtClean="0"/>
-              <a:t>8/4/2025</a:t>
+              <a:t>8/16/2025</a:t>
             </a:fld>
             <a:endParaRPr lang="en-US" dirty="0"/>
           </a:p>
@@ -4302,7 +4328,7 @@
             <a:fld id="{5FDFC970-B950-4395-A833-47227D4A68CA}" type="datetime1">
               <a:rPr lang="en-US" smtClean="0"/>
               <a:pPr/>
-              <a:t>8/4/2025</a:t>
+              <a:t>8/16/2025</a:t>
             </a:fld>
             <a:endParaRPr lang="en-US" dirty="0"/>
           </a:p>
@@ -4824,7 +4850,7 @@
             <a:fld id="{5FDFC970-B950-4395-A833-47227D4A68CA}" type="datetime1">
               <a:rPr lang="en-US" smtClean="0"/>
               <a:pPr/>
-              <a:t>8/4/2025</a:t>
+              <a:t>8/16/2025</a:t>
             </a:fld>
             <a:endParaRPr lang="en-US" dirty="0"/>
           </a:p>
@@ -5282,7 +5308,7 @@
           <a:p>
             <a:fld id="{75D660D7-90CE-4513-A3CE-C070B9421917}" type="datetime1">
               <a:rPr lang="en-US" smtClean="0"/>
-              <a:t>8/4/2025</a:t>
+              <a:t>8/16/2025</a:t>
             </a:fld>
             <a:endParaRPr lang="en-US" dirty="0"/>
           </a:p>
@@ -5867,7 +5893,7 @@
             <a:fld id="{A318C6E2-4AA5-436E-9815-715E9B2235FA}" type="datetime1">
               <a:rPr lang="en-US" smtClean="0"/>
               <a:pPr/>
-              <a:t>8/4/2025</a:t>
+              <a:t>8/16/2025</a:t>
             </a:fld>
             <a:endParaRPr lang="en-US" dirty="0"/>
           </a:p>
@@ -6380,7 +6406,7 @@
             <a:fld id="{0A368D4B-3D0A-49AB-8EA2-2DC8CB4594DB}" type="datetime1">
               <a:rPr lang="en-US" smtClean="0"/>
               <a:pPr/>
-              <a:t>8/4/2025</a:t>
+              <a:t>8/16/2025</a:t>
             </a:fld>
             <a:endParaRPr lang="en-US" dirty="0"/>
           </a:p>
@@ -6849,7 +6875,7 @@
             <a:fld id="{0A368D4B-3D0A-49AB-8EA2-2DC8CB4594DB}" type="datetime1">
               <a:rPr lang="en-US" smtClean="0"/>
               <a:pPr/>
-              <a:t>8/4/2025</a:t>
+              <a:t>8/16/2025</a:t>
             </a:fld>
             <a:endParaRPr lang="en-US" dirty="0"/>
           </a:p>
@@ -7540,7 +7566,7 @@
             <a:fld id="{A318C6E2-4AA5-436E-9815-715E9B2235FA}" type="datetime1">
               <a:rPr lang="en-US" smtClean="0"/>
               <a:pPr/>
-              <a:t>8/4/2025</a:t>
+              <a:t>8/16/2025</a:t>
             </a:fld>
             <a:endParaRPr lang="en-US" dirty="0"/>
           </a:p>
@@ -8123,7 +8149,7 @@
             <a:fld id="{A318C6E2-4AA5-436E-9815-715E9B2235FA}" type="datetime1">
               <a:rPr lang="en-US" smtClean="0"/>
               <a:pPr/>
-              <a:t>8/4/2025</a:t>
+              <a:t>8/16/2025</a:t>
             </a:fld>
             <a:endParaRPr lang="en-US" dirty="0"/>
           </a:p>
@@ -8653,7 +8679,7 @@
           <a:p>
             <a:fld id="{44D4B0C9-B47E-4B33-A656-C78D1805DA95}" type="datetime1">
               <a:rPr lang="en-US" smtClean="0"/>
-              <a:t>8/4/2025</a:t>
+              <a:t>8/16/2025</a:t>
             </a:fld>
             <a:endParaRPr lang="en-US" dirty="0"/>
           </a:p>
@@ -8945,7 +8971,7 @@
           <a:p>
             <a:fld id="{48C228CE-C572-4AF5-9728-AA6E475873DD}" type="datetime1">
               <a:rPr lang="en-US" smtClean="0"/>
-              <a:t>8/4/2025</a:t>
+              <a:t>8/16/2025</a:t>
             </a:fld>
             <a:endParaRPr lang="en-US" dirty="0"/>
           </a:p>
@@ -9249,7 +9275,7 @@
           <a:p>
             <a:fld id="{026D43AC-4B94-471D-A170-0D88FCD1FB54}" type="datetime1">
               <a:rPr lang="en-US" smtClean="0"/>
-              <a:t>8/4/2025</a:t>
+              <a:t>8/16/2025</a:t>
             </a:fld>
             <a:endParaRPr lang="en-US" dirty="0"/>
           </a:p>
@@ -9480,7 +9506,7 @@
           <a:p>
             <a:fld id="{72EFF9E2-52BD-4C8D-9C57-79F661DB94A1}" type="datetime1">
               <a:rPr lang="en-US" smtClean="0"/>
-              <a:t>8/4/2025</a:t>
+              <a:t>8/16/2025</a:t>
             </a:fld>
             <a:endParaRPr lang="en-US" dirty="0"/>
           </a:p>
@@ -10128,7 +10154,7 @@
           <a:p>
             <a:fld id="{081881F3-AB4F-4026-8B03-DBF7475676B1}" type="datetime1">
               <a:rPr lang="en-US" smtClean="0"/>
-              <a:t>8/4/2025</a:t>
+              <a:t>8/16/2025</a:t>
             </a:fld>
             <a:endParaRPr lang="en-US" dirty="0"/>
           </a:p>
@@ -10389,7 +10415,7 @@
           <a:p>
             <a:fld id="{5FDFC970-B950-4395-A833-47227D4A68CA}" type="datetime1">
               <a:rPr lang="en-US" smtClean="0"/>
-              <a:t>8/4/2025</a:t>
+              <a:t>8/16/2025</a:t>
             </a:fld>
             <a:endParaRPr lang="en-US" dirty="0"/>
           </a:p>
@@ -11852,6 +11878,924 @@
 </p:sld>
 </file>
 
+<file path=ppt/slides/slide14.xml><?xml version="1.0" encoding="utf-8"?>
+<p:sld xmlns:a="http://schemas.openxmlformats.org/drawingml/2006/main" xmlns:r="http://schemas.openxmlformats.org/officeDocument/2006/relationships" xmlns:p="http://schemas.openxmlformats.org/presentationml/2006/main">
+  <p:cSld>
+    <p:spTree>
+      <p:nvGrpSpPr>
+        <p:cNvPr id="1" name=""/>
+        <p:cNvGrpSpPr/>
+        <p:nvPr/>
+      </p:nvGrpSpPr>
+      <p:grpSpPr>
+        <a:xfrm>
+          <a:off x="0" y="0"/>
+          <a:ext cx="0" cy="0"/>
+          <a:chOff x="0" y="0"/>
+          <a:chExt cx="0" cy="0"/>
+        </a:xfrm>
+      </p:grpSpPr>
+      <p:sp>
+        <p:nvSpPr>
+          <p:cNvPr id="2" name="Title 1">
+            <a:extLst>
+              <a:ext uri="{FF2B5EF4-FFF2-40B4-BE49-F238E27FC236}">
+                <a16:creationId xmlns:a16="http://schemas.microsoft.com/office/drawing/2014/main" id="{C9C018C7-571B-0DD4-51CE-6B7D16054DDE}"/>
+              </a:ext>
+            </a:extLst>
+          </p:cNvPr>
+          <p:cNvSpPr>
+            <a:spLocks noGrp="1"/>
+          </p:cNvSpPr>
+          <p:nvPr>
+            <p:ph type="title"/>
+          </p:nvPr>
+        </p:nvSpPr>
+        <p:spPr/>
+        <p:txBody>
+          <a:bodyPr/>
+          <a:lstStyle/>
+          <a:p>
+            <a:r>
+              <a:rPr lang="en-US" dirty="0"/>
+              <a:t>Float 32</a:t>
+            </a:r>
+          </a:p>
+        </p:txBody>
+      </p:sp>
+      <p:pic>
+        <p:nvPicPr>
+          <p:cNvPr id="7" name="Content Placeholder 6">
+            <a:extLst>
+              <a:ext uri="{FF2B5EF4-FFF2-40B4-BE49-F238E27FC236}">
+                <a16:creationId xmlns:a16="http://schemas.microsoft.com/office/drawing/2014/main" id="{C97FF1E2-7CAD-A7DF-FDF4-21E66BC6BCE4}"/>
+              </a:ext>
+            </a:extLst>
+          </p:cNvPr>
+          <p:cNvPicPr>
+            <a:picLocks noGrp="1" noChangeAspect="1"/>
+          </p:cNvPicPr>
+          <p:nvPr>
+            <p:ph idx="1"/>
+          </p:nvPr>
+        </p:nvPicPr>
+        <p:blipFill>
+          <a:blip r:embed="rId2"/>
+          <a:stretch>
+            <a:fillRect/>
+          </a:stretch>
+        </p:blipFill>
+        <p:spPr>
+          <a:xfrm>
+            <a:off x="2002699" y="1412875"/>
+            <a:ext cx="8085002" cy="4595813"/>
+          </a:xfrm>
+        </p:spPr>
+      </p:pic>
+      <p:sp>
+        <p:nvSpPr>
+          <p:cNvPr id="4" name="Footer Placeholder 3">
+            <a:extLst>
+              <a:ext uri="{FF2B5EF4-FFF2-40B4-BE49-F238E27FC236}">
+                <a16:creationId xmlns:a16="http://schemas.microsoft.com/office/drawing/2014/main" id="{15835CF4-8094-F534-8700-ABA6089A469F}"/>
+              </a:ext>
+            </a:extLst>
+          </p:cNvPr>
+          <p:cNvSpPr>
+            <a:spLocks noGrp="1"/>
+          </p:cNvSpPr>
+          <p:nvPr>
+            <p:ph type="ftr" sz="quarter" idx="11"/>
+          </p:nvPr>
+        </p:nvSpPr>
+        <p:spPr/>
+        <p:txBody>
+          <a:bodyPr/>
+          <a:lstStyle/>
+          <a:p>
+            <a:r>
+              <a:rPr lang="en-US"/>
+              <a:t>Progress Update</a:t>
+            </a:r>
+            <a:endParaRPr lang="en-US" dirty="0"/>
+          </a:p>
+        </p:txBody>
+      </p:sp>
+      <p:sp>
+        <p:nvSpPr>
+          <p:cNvPr id="5" name="Slide Number Placeholder 4">
+            <a:extLst>
+              <a:ext uri="{FF2B5EF4-FFF2-40B4-BE49-F238E27FC236}">
+                <a16:creationId xmlns:a16="http://schemas.microsoft.com/office/drawing/2014/main" id="{24C24BD7-9593-6976-A92F-2C277DD196E3}"/>
+              </a:ext>
+            </a:extLst>
+          </p:cNvPr>
+          <p:cNvSpPr>
+            <a:spLocks noGrp="1"/>
+          </p:cNvSpPr>
+          <p:nvPr>
+            <p:ph type="sldNum" sz="quarter" idx="12"/>
+          </p:nvPr>
+        </p:nvSpPr>
+        <p:spPr/>
+        <p:txBody>
+          <a:bodyPr/>
+          <a:lstStyle/>
+          <a:p>
+            <a:r>
+              <a:rPr lang="en-US"/>
+              <a:t>PAGE  </a:t>
+            </a:r>
+            <a:fld id="{93005692-73BE-493E-93AB-ECD6027A7652}" type="slidenum">
+              <a:rPr lang="en-US" smtClean="0"/>
+              <a:pPr/>
+              <a:t>14</a:t>
+            </a:fld>
+            <a:endParaRPr lang="en-US" dirty="0"/>
+          </a:p>
+        </p:txBody>
+      </p:sp>
+    </p:spTree>
+    <p:extLst>
+      <p:ext uri="{BB962C8B-B14F-4D97-AF65-F5344CB8AC3E}">
+        <p14:creationId xmlns:p14="http://schemas.microsoft.com/office/powerpoint/2010/main" val="3499716910"/>
+      </p:ext>
+    </p:extLst>
+  </p:cSld>
+  <p:clrMapOvr>
+    <a:masterClrMapping/>
+  </p:clrMapOvr>
+  <p:transition spd="slow">
+    <p:push dir="u"/>
+  </p:transition>
+</p:sld>
+</file>
+
+<file path=ppt/slides/slide15.xml><?xml version="1.0" encoding="utf-8"?>
+<p:sld xmlns:a="http://schemas.openxmlformats.org/drawingml/2006/main" xmlns:r="http://schemas.openxmlformats.org/officeDocument/2006/relationships" xmlns:p="http://schemas.openxmlformats.org/presentationml/2006/main">
+  <p:cSld>
+    <p:spTree>
+      <p:nvGrpSpPr>
+        <p:cNvPr id="1" name=""/>
+        <p:cNvGrpSpPr/>
+        <p:nvPr/>
+      </p:nvGrpSpPr>
+      <p:grpSpPr>
+        <a:xfrm>
+          <a:off x="0" y="0"/>
+          <a:ext cx="0" cy="0"/>
+          <a:chOff x="0" y="0"/>
+          <a:chExt cx="0" cy="0"/>
+        </a:xfrm>
+      </p:grpSpPr>
+      <p:sp>
+        <p:nvSpPr>
+          <p:cNvPr id="2" name="Title 1">
+            <a:extLst>
+              <a:ext uri="{FF2B5EF4-FFF2-40B4-BE49-F238E27FC236}">
+                <a16:creationId xmlns:a16="http://schemas.microsoft.com/office/drawing/2014/main" id="{A1D0A727-A7AD-5808-1189-76952FFFE692}"/>
+              </a:ext>
+            </a:extLst>
+          </p:cNvPr>
+          <p:cNvSpPr>
+            <a:spLocks noGrp="1"/>
+          </p:cNvSpPr>
+          <p:nvPr>
+            <p:ph type="title"/>
+          </p:nvPr>
+        </p:nvSpPr>
+        <p:spPr/>
+        <p:txBody>
+          <a:bodyPr/>
+          <a:lstStyle/>
+          <a:p>
+            <a:r>
+              <a:rPr lang="en-US" dirty="0"/>
+              <a:t>Float 32</a:t>
+            </a:r>
+          </a:p>
+        </p:txBody>
+      </p:sp>
+      <p:pic>
+        <p:nvPicPr>
+          <p:cNvPr id="7" name="Content Placeholder 6">
+            <a:extLst>
+              <a:ext uri="{FF2B5EF4-FFF2-40B4-BE49-F238E27FC236}">
+                <a16:creationId xmlns:a16="http://schemas.microsoft.com/office/drawing/2014/main" id="{0312AA0F-9889-689A-AD5D-5E2B39A84591}"/>
+              </a:ext>
+            </a:extLst>
+          </p:cNvPr>
+          <p:cNvPicPr>
+            <a:picLocks noGrp="1" noChangeAspect="1"/>
+          </p:cNvPicPr>
+          <p:nvPr>
+            <p:ph idx="1"/>
+          </p:nvPr>
+        </p:nvPicPr>
+        <p:blipFill>
+          <a:blip r:embed="rId2"/>
+          <a:stretch>
+            <a:fillRect/>
+          </a:stretch>
+        </p:blipFill>
+        <p:spPr>
+          <a:xfrm>
+            <a:off x="1686448" y="1412875"/>
+            <a:ext cx="8717504" cy="4595813"/>
+          </a:xfrm>
+        </p:spPr>
+      </p:pic>
+      <p:sp>
+        <p:nvSpPr>
+          <p:cNvPr id="4" name="Footer Placeholder 3">
+            <a:extLst>
+              <a:ext uri="{FF2B5EF4-FFF2-40B4-BE49-F238E27FC236}">
+                <a16:creationId xmlns:a16="http://schemas.microsoft.com/office/drawing/2014/main" id="{F81F7C09-E46F-F780-F80E-656132AEFB99}"/>
+              </a:ext>
+            </a:extLst>
+          </p:cNvPr>
+          <p:cNvSpPr>
+            <a:spLocks noGrp="1"/>
+          </p:cNvSpPr>
+          <p:nvPr>
+            <p:ph type="ftr" sz="quarter" idx="11"/>
+          </p:nvPr>
+        </p:nvSpPr>
+        <p:spPr/>
+        <p:txBody>
+          <a:bodyPr/>
+          <a:lstStyle/>
+          <a:p>
+            <a:r>
+              <a:rPr lang="en-US"/>
+              <a:t>Progress Update</a:t>
+            </a:r>
+            <a:endParaRPr lang="en-US" dirty="0"/>
+          </a:p>
+        </p:txBody>
+      </p:sp>
+      <p:sp>
+        <p:nvSpPr>
+          <p:cNvPr id="5" name="Slide Number Placeholder 4">
+            <a:extLst>
+              <a:ext uri="{FF2B5EF4-FFF2-40B4-BE49-F238E27FC236}">
+                <a16:creationId xmlns:a16="http://schemas.microsoft.com/office/drawing/2014/main" id="{97B2A25F-84B0-6B8E-0202-8F77AE2B4264}"/>
+              </a:ext>
+            </a:extLst>
+          </p:cNvPr>
+          <p:cNvSpPr>
+            <a:spLocks noGrp="1"/>
+          </p:cNvSpPr>
+          <p:nvPr>
+            <p:ph type="sldNum" sz="quarter" idx="12"/>
+          </p:nvPr>
+        </p:nvSpPr>
+        <p:spPr/>
+        <p:txBody>
+          <a:bodyPr/>
+          <a:lstStyle/>
+          <a:p>
+            <a:r>
+              <a:rPr lang="en-US"/>
+              <a:t>PAGE  </a:t>
+            </a:r>
+            <a:fld id="{93005692-73BE-493E-93AB-ECD6027A7652}" type="slidenum">
+              <a:rPr lang="en-US" smtClean="0"/>
+              <a:pPr/>
+              <a:t>15</a:t>
+            </a:fld>
+            <a:endParaRPr lang="en-US" dirty="0"/>
+          </a:p>
+        </p:txBody>
+      </p:sp>
+    </p:spTree>
+    <p:extLst>
+      <p:ext uri="{BB962C8B-B14F-4D97-AF65-F5344CB8AC3E}">
+        <p14:creationId xmlns:p14="http://schemas.microsoft.com/office/powerpoint/2010/main" val="2948601564"/>
+      </p:ext>
+    </p:extLst>
+  </p:cSld>
+  <p:clrMapOvr>
+    <a:masterClrMapping/>
+  </p:clrMapOvr>
+  <p:transition spd="slow">
+    <p:push dir="u"/>
+  </p:transition>
+</p:sld>
+</file>
+
+<file path=ppt/slides/slide16.xml><?xml version="1.0" encoding="utf-8"?>
+<p:sld xmlns:a="http://schemas.openxmlformats.org/drawingml/2006/main" xmlns:r="http://schemas.openxmlformats.org/officeDocument/2006/relationships" xmlns:p="http://schemas.openxmlformats.org/presentationml/2006/main">
+  <p:cSld>
+    <p:spTree>
+      <p:nvGrpSpPr>
+        <p:cNvPr id="1" name=""/>
+        <p:cNvGrpSpPr/>
+        <p:nvPr/>
+      </p:nvGrpSpPr>
+      <p:grpSpPr>
+        <a:xfrm>
+          <a:off x="0" y="0"/>
+          <a:ext cx="0" cy="0"/>
+          <a:chOff x="0" y="0"/>
+          <a:chExt cx="0" cy="0"/>
+        </a:xfrm>
+      </p:grpSpPr>
+      <p:sp>
+        <p:nvSpPr>
+          <p:cNvPr id="2" name="Title 1">
+            <a:extLst>
+              <a:ext uri="{FF2B5EF4-FFF2-40B4-BE49-F238E27FC236}">
+                <a16:creationId xmlns:a16="http://schemas.microsoft.com/office/drawing/2014/main" id="{4DD4FC84-5DA2-9A98-A12D-86B23B161A9E}"/>
+              </a:ext>
+            </a:extLst>
+          </p:cNvPr>
+          <p:cNvSpPr>
+            <a:spLocks noGrp="1"/>
+          </p:cNvSpPr>
+          <p:nvPr>
+            <p:ph type="title"/>
+          </p:nvPr>
+        </p:nvSpPr>
+        <p:spPr/>
+        <p:txBody>
+          <a:bodyPr/>
+          <a:lstStyle/>
+          <a:p>
+            <a:r>
+              <a:rPr lang="en-US" dirty="0"/>
+              <a:t>Float 32</a:t>
+            </a:r>
+          </a:p>
+        </p:txBody>
+      </p:sp>
+      <p:pic>
+        <p:nvPicPr>
+          <p:cNvPr id="7" name="Content Placeholder 6">
+            <a:extLst>
+              <a:ext uri="{FF2B5EF4-FFF2-40B4-BE49-F238E27FC236}">
+                <a16:creationId xmlns:a16="http://schemas.microsoft.com/office/drawing/2014/main" id="{6C928064-0991-A105-9C13-4894596D8A7E}"/>
+              </a:ext>
+            </a:extLst>
+          </p:cNvPr>
+          <p:cNvPicPr>
+            <a:picLocks noGrp="1" noChangeAspect="1"/>
+          </p:cNvPicPr>
+          <p:nvPr>
+            <p:ph idx="1"/>
+          </p:nvPr>
+        </p:nvPicPr>
+        <p:blipFill>
+          <a:blip r:embed="rId2"/>
+          <a:stretch>
+            <a:fillRect/>
+          </a:stretch>
+        </p:blipFill>
+        <p:spPr>
+          <a:xfrm>
+            <a:off x="1672078" y="1412875"/>
+            <a:ext cx="8746244" cy="4595813"/>
+          </a:xfrm>
+        </p:spPr>
+      </p:pic>
+      <p:sp>
+        <p:nvSpPr>
+          <p:cNvPr id="4" name="Footer Placeholder 3">
+            <a:extLst>
+              <a:ext uri="{FF2B5EF4-FFF2-40B4-BE49-F238E27FC236}">
+                <a16:creationId xmlns:a16="http://schemas.microsoft.com/office/drawing/2014/main" id="{E0930C1B-B11C-1366-1A84-13099A491EE7}"/>
+              </a:ext>
+            </a:extLst>
+          </p:cNvPr>
+          <p:cNvSpPr>
+            <a:spLocks noGrp="1"/>
+          </p:cNvSpPr>
+          <p:nvPr>
+            <p:ph type="ftr" sz="quarter" idx="11"/>
+          </p:nvPr>
+        </p:nvSpPr>
+        <p:spPr/>
+        <p:txBody>
+          <a:bodyPr/>
+          <a:lstStyle/>
+          <a:p>
+            <a:r>
+              <a:rPr lang="en-US"/>
+              <a:t>Progress Update</a:t>
+            </a:r>
+            <a:endParaRPr lang="en-US" dirty="0"/>
+          </a:p>
+        </p:txBody>
+      </p:sp>
+      <p:sp>
+        <p:nvSpPr>
+          <p:cNvPr id="5" name="Slide Number Placeholder 4">
+            <a:extLst>
+              <a:ext uri="{FF2B5EF4-FFF2-40B4-BE49-F238E27FC236}">
+                <a16:creationId xmlns:a16="http://schemas.microsoft.com/office/drawing/2014/main" id="{2B290516-CDE7-F041-98F8-964F9ACB5F19}"/>
+              </a:ext>
+            </a:extLst>
+          </p:cNvPr>
+          <p:cNvSpPr>
+            <a:spLocks noGrp="1"/>
+          </p:cNvSpPr>
+          <p:nvPr>
+            <p:ph type="sldNum" sz="quarter" idx="12"/>
+          </p:nvPr>
+        </p:nvSpPr>
+        <p:spPr/>
+        <p:txBody>
+          <a:bodyPr/>
+          <a:lstStyle/>
+          <a:p>
+            <a:r>
+              <a:rPr lang="en-US"/>
+              <a:t>PAGE  </a:t>
+            </a:r>
+            <a:fld id="{93005692-73BE-493E-93AB-ECD6027A7652}" type="slidenum">
+              <a:rPr lang="en-US" smtClean="0"/>
+              <a:pPr/>
+              <a:t>16</a:t>
+            </a:fld>
+            <a:endParaRPr lang="en-US" dirty="0"/>
+          </a:p>
+        </p:txBody>
+      </p:sp>
+    </p:spTree>
+    <p:extLst>
+      <p:ext uri="{BB962C8B-B14F-4D97-AF65-F5344CB8AC3E}">
+        <p14:creationId xmlns:p14="http://schemas.microsoft.com/office/powerpoint/2010/main" val="2236054520"/>
+      </p:ext>
+    </p:extLst>
+  </p:cSld>
+  <p:clrMapOvr>
+    <a:masterClrMapping/>
+  </p:clrMapOvr>
+  <p:transition spd="slow">
+    <p:push dir="u"/>
+  </p:transition>
+</p:sld>
+</file>
+
+<file path=ppt/slides/slide17.xml><?xml version="1.0" encoding="utf-8"?>
+<p:sld xmlns:a="http://schemas.openxmlformats.org/drawingml/2006/main" xmlns:r="http://schemas.openxmlformats.org/officeDocument/2006/relationships" xmlns:p="http://schemas.openxmlformats.org/presentationml/2006/main">
+  <p:cSld>
+    <p:spTree>
+      <p:nvGrpSpPr>
+        <p:cNvPr id="1" name=""/>
+        <p:cNvGrpSpPr/>
+        <p:nvPr/>
+      </p:nvGrpSpPr>
+      <p:grpSpPr>
+        <a:xfrm>
+          <a:off x="0" y="0"/>
+          <a:ext cx="0" cy="0"/>
+          <a:chOff x="0" y="0"/>
+          <a:chExt cx="0" cy="0"/>
+        </a:xfrm>
+      </p:grpSpPr>
+      <p:sp>
+        <p:nvSpPr>
+          <p:cNvPr id="2" name="Title 1">
+            <a:extLst>
+              <a:ext uri="{FF2B5EF4-FFF2-40B4-BE49-F238E27FC236}">
+                <a16:creationId xmlns:a16="http://schemas.microsoft.com/office/drawing/2014/main" id="{55886BF2-EB2C-D9FF-834F-64BA01290254}"/>
+              </a:ext>
+            </a:extLst>
+          </p:cNvPr>
+          <p:cNvSpPr>
+            <a:spLocks noGrp="1"/>
+          </p:cNvSpPr>
+          <p:nvPr>
+            <p:ph type="title"/>
+          </p:nvPr>
+        </p:nvSpPr>
+        <p:spPr/>
+        <p:txBody>
+          <a:bodyPr/>
+          <a:lstStyle/>
+          <a:p>
+            <a:r>
+              <a:rPr lang="en-US" dirty="0"/>
+              <a:t>Float 64</a:t>
+            </a:r>
+          </a:p>
+        </p:txBody>
+      </p:sp>
+      <p:sp>
+        <p:nvSpPr>
+          <p:cNvPr id="4" name="Footer Placeholder 3">
+            <a:extLst>
+              <a:ext uri="{FF2B5EF4-FFF2-40B4-BE49-F238E27FC236}">
+                <a16:creationId xmlns:a16="http://schemas.microsoft.com/office/drawing/2014/main" id="{2D3BC773-70EA-5703-BC60-97246F0F43CE}"/>
+              </a:ext>
+            </a:extLst>
+          </p:cNvPr>
+          <p:cNvSpPr>
+            <a:spLocks noGrp="1"/>
+          </p:cNvSpPr>
+          <p:nvPr>
+            <p:ph type="ftr" sz="quarter" idx="11"/>
+          </p:nvPr>
+        </p:nvSpPr>
+        <p:spPr/>
+        <p:txBody>
+          <a:bodyPr/>
+          <a:lstStyle/>
+          <a:p>
+            <a:r>
+              <a:rPr lang="en-US"/>
+              <a:t>Progress Update</a:t>
+            </a:r>
+            <a:endParaRPr lang="en-US" dirty="0"/>
+          </a:p>
+        </p:txBody>
+      </p:sp>
+      <p:sp>
+        <p:nvSpPr>
+          <p:cNvPr id="5" name="Slide Number Placeholder 4">
+            <a:extLst>
+              <a:ext uri="{FF2B5EF4-FFF2-40B4-BE49-F238E27FC236}">
+                <a16:creationId xmlns:a16="http://schemas.microsoft.com/office/drawing/2014/main" id="{8E00B381-1AAB-B4DF-80F7-8F38B028B562}"/>
+              </a:ext>
+            </a:extLst>
+          </p:cNvPr>
+          <p:cNvSpPr>
+            <a:spLocks noGrp="1"/>
+          </p:cNvSpPr>
+          <p:nvPr>
+            <p:ph type="sldNum" sz="quarter" idx="12"/>
+          </p:nvPr>
+        </p:nvSpPr>
+        <p:spPr/>
+        <p:txBody>
+          <a:bodyPr/>
+          <a:lstStyle/>
+          <a:p>
+            <a:r>
+              <a:rPr lang="en-US"/>
+              <a:t>PAGE  </a:t>
+            </a:r>
+            <a:fld id="{93005692-73BE-493E-93AB-ECD6027A7652}" type="slidenum">
+              <a:rPr lang="en-US" smtClean="0"/>
+              <a:pPr/>
+              <a:t>17</a:t>
+            </a:fld>
+            <a:endParaRPr lang="en-US" dirty="0"/>
+          </a:p>
+        </p:txBody>
+      </p:sp>
+      <p:pic>
+        <p:nvPicPr>
+          <p:cNvPr id="13" name="Content Placeholder 12">
+            <a:extLst>
+              <a:ext uri="{FF2B5EF4-FFF2-40B4-BE49-F238E27FC236}">
+                <a16:creationId xmlns:a16="http://schemas.microsoft.com/office/drawing/2014/main" id="{4CC5A0B4-E5AB-7372-52C3-105B9ED9D53B}"/>
+              </a:ext>
+            </a:extLst>
+          </p:cNvPr>
+          <p:cNvPicPr>
+            <a:picLocks noGrp="1" noChangeAspect="1"/>
+          </p:cNvPicPr>
+          <p:nvPr>
+            <p:ph idx="1"/>
+          </p:nvPr>
+        </p:nvPicPr>
+        <p:blipFill>
+          <a:blip r:embed="rId2"/>
+          <a:stretch>
+            <a:fillRect/>
+          </a:stretch>
+        </p:blipFill>
+        <p:spPr>
+          <a:xfrm>
+            <a:off x="1995485" y="1412875"/>
+            <a:ext cx="8099429" cy="4595813"/>
+          </a:xfrm>
+        </p:spPr>
+      </p:pic>
+    </p:spTree>
+    <p:extLst>
+      <p:ext uri="{BB962C8B-B14F-4D97-AF65-F5344CB8AC3E}">
+        <p14:creationId xmlns:p14="http://schemas.microsoft.com/office/powerpoint/2010/main" val="2195100694"/>
+      </p:ext>
+    </p:extLst>
+  </p:cSld>
+  <p:clrMapOvr>
+    <a:masterClrMapping/>
+  </p:clrMapOvr>
+  <p:transition spd="slow">
+    <p:push dir="u"/>
+  </p:transition>
+</p:sld>
+</file>
+
+<file path=ppt/slides/slide18.xml><?xml version="1.0" encoding="utf-8"?>
+<p:sld xmlns:a="http://schemas.openxmlformats.org/drawingml/2006/main" xmlns:r="http://schemas.openxmlformats.org/officeDocument/2006/relationships" xmlns:p="http://schemas.openxmlformats.org/presentationml/2006/main">
+  <p:cSld>
+    <p:spTree>
+      <p:nvGrpSpPr>
+        <p:cNvPr id="1" name=""/>
+        <p:cNvGrpSpPr/>
+        <p:nvPr/>
+      </p:nvGrpSpPr>
+      <p:grpSpPr>
+        <a:xfrm>
+          <a:off x="0" y="0"/>
+          <a:ext cx="0" cy="0"/>
+          <a:chOff x="0" y="0"/>
+          <a:chExt cx="0" cy="0"/>
+        </a:xfrm>
+      </p:grpSpPr>
+      <p:sp>
+        <p:nvSpPr>
+          <p:cNvPr id="2" name="Title 1">
+            <a:extLst>
+              <a:ext uri="{FF2B5EF4-FFF2-40B4-BE49-F238E27FC236}">
+                <a16:creationId xmlns:a16="http://schemas.microsoft.com/office/drawing/2014/main" id="{8CD63098-EB28-22D9-29E1-47A77F57F0D7}"/>
+              </a:ext>
+            </a:extLst>
+          </p:cNvPr>
+          <p:cNvSpPr>
+            <a:spLocks noGrp="1"/>
+          </p:cNvSpPr>
+          <p:nvPr>
+            <p:ph type="title"/>
+          </p:nvPr>
+        </p:nvSpPr>
+        <p:spPr/>
+        <p:txBody>
+          <a:bodyPr/>
+          <a:lstStyle/>
+          <a:p>
+            <a:r>
+              <a:rPr lang="en-US" dirty="0"/>
+              <a:t>Float 64</a:t>
+            </a:r>
+          </a:p>
+        </p:txBody>
+      </p:sp>
+      <p:pic>
+        <p:nvPicPr>
+          <p:cNvPr id="7" name="Content Placeholder 6">
+            <a:extLst>
+              <a:ext uri="{FF2B5EF4-FFF2-40B4-BE49-F238E27FC236}">
+                <a16:creationId xmlns:a16="http://schemas.microsoft.com/office/drawing/2014/main" id="{798127A9-0A5B-5D78-E169-369367F31782}"/>
+              </a:ext>
+            </a:extLst>
+          </p:cNvPr>
+          <p:cNvPicPr>
+            <a:picLocks noGrp="1" noChangeAspect="1"/>
+          </p:cNvPicPr>
+          <p:nvPr>
+            <p:ph idx="1"/>
+          </p:nvPr>
+        </p:nvPicPr>
+        <p:blipFill>
+          <a:blip r:embed="rId2"/>
+          <a:stretch>
+            <a:fillRect/>
+          </a:stretch>
+        </p:blipFill>
+        <p:spPr>
+          <a:xfrm>
+            <a:off x="1577414" y="1412875"/>
+            <a:ext cx="8935572" cy="4595813"/>
+          </a:xfrm>
+        </p:spPr>
+      </p:pic>
+      <p:sp>
+        <p:nvSpPr>
+          <p:cNvPr id="4" name="Footer Placeholder 3">
+            <a:extLst>
+              <a:ext uri="{FF2B5EF4-FFF2-40B4-BE49-F238E27FC236}">
+                <a16:creationId xmlns:a16="http://schemas.microsoft.com/office/drawing/2014/main" id="{435FC6E3-3F4A-39C4-F670-C31AA608B141}"/>
+              </a:ext>
+            </a:extLst>
+          </p:cNvPr>
+          <p:cNvSpPr>
+            <a:spLocks noGrp="1"/>
+          </p:cNvSpPr>
+          <p:nvPr>
+            <p:ph type="ftr" sz="quarter" idx="11"/>
+          </p:nvPr>
+        </p:nvSpPr>
+        <p:spPr/>
+        <p:txBody>
+          <a:bodyPr/>
+          <a:lstStyle/>
+          <a:p>
+            <a:r>
+              <a:rPr lang="en-US"/>
+              <a:t>Progress Update</a:t>
+            </a:r>
+            <a:endParaRPr lang="en-US" dirty="0"/>
+          </a:p>
+        </p:txBody>
+      </p:sp>
+      <p:sp>
+        <p:nvSpPr>
+          <p:cNvPr id="5" name="Slide Number Placeholder 4">
+            <a:extLst>
+              <a:ext uri="{FF2B5EF4-FFF2-40B4-BE49-F238E27FC236}">
+                <a16:creationId xmlns:a16="http://schemas.microsoft.com/office/drawing/2014/main" id="{EB5909FF-0BB2-93A7-5F43-CF56777C0472}"/>
+              </a:ext>
+            </a:extLst>
+          </p:cNvPr>
+          <p:cNvSpPr>
+            <a:spLocks noGrp="1"/>
+          </p:cNvSpPr>
+          <p:nvPr>
+            <p:ph type="sldNum" sz="quarter" idx="12"/>
+          </p:nvPr>
+        </p:nvSpPr>
+        <p:spPr/>
+        <p:txBody>
+          <a:bodyPr/>
+          <a:lstStyle/>
+          <a:p>
+            <a:r>
+              <a:rPr lang="en-US"/>
+              <a:t>PAGE  </a:t>
+            </a:r>
+            <a:fld id="{93005692-73BE-493E-93AB-ECD6027A7652}" type="slidenum">
+              <a:rPr lang="en-US" smtClean="0"/>
+              <a:pPr/>
+              <a:t>18</a:t>
+            </a:fld>
+            <a:endParaRPr lang="en-US" dirty="0"/>
+          </a:p>
+        </p:txBody>
+      </p:sp>
+    </p:spTree>
+    <p:extLst>
+      <p:ext uri="{BB962C8B-B14F-4D97-AF65-F5344CB8AC3E}">
+        <p14:creationId xmlns:p14="http://schemas.microsoft.com/office/powerpoint/2010/main" val="3108310944"/>
+      </p:ext>
+    </p:extLst>
+  </p:cSld>
+  <p:clrMapOvr>
+    <a:masterClrMapping/>
+  </p:clrMapOvr>
+  <p:transition spd="slow">
+    <p:push dir="u"/>
+  </p:transition>
+</p:sld>
+</file>
+
+<file path=ppt/slides/slide19.xml><?xml version="1.0" encoding="utf-8"?>
+<p:sld xmlns:a="http://schemas.openxmlformats.org/drawingml/2006/main" xmlns:r="http://schemas.openxmlformats.org/officeDocument/2006/relationships" xmlns:p="http://schemas.openxmlformats.org/presentationml/2006/main">
+  <p:cSld>
+    <p:spTree>
+      <p:nvGrpSpPr>
+        <p:cNvPr id="1" name=""/>
+        <p:cNvGrpSpPr/>
+        <p:nvPr/>
+      </p:nvGrpSpPr>
+      <p:grpSpPr>
+        <a:xfrm>
+          <a:off x="0" y="0"/>
+          <a:ext cx="0" cy="0"/>
+          <a:chOff x="0" y="0"/>
+          <a:chExt cx="0" cy="0"/>
+        </a:xfrm>
+      </p:grpSpPr>
+      <p:sp>
+        <p:nvSpPr>
+          <p:cNvPr id="2" name="Title 1">
+            <a:extLst>
+              <a:ext uri="{FF2B5EF4-FFF2-40B4-BE49-F238E27FC236}">
+                <a16:creationId xmlns:a16="http://schemas.microsoft.com/office/drawing/2014/main" id="{999D0517-DC14-A10A-5E7C-AE9DB2BAA91F}"/>
+              </a:ext>
+            </a:extLst>
+          </p:cNvPr>
+          <p:cNvSpPr>
+            <a:spLocks noGrp="1"/>
+          </p:cNvSpPr>
+          <p:nvPr>
+            <p:ph type="title"/>
+          </p:nvPr>
+        </p:nvSpPr>
+        <p:spPr/>
+        <p:txBody>
+          <a:bodyPr/>
+          <a:lstStyle/>
+          <a:p>
+            <a:r>
+              <a:rPr lang="en-US" dirty="0"/>
+              <a:t>Float 64</a:t>
+            </a:r>
+          </a:p>
+        </p:txBody>
+      </p:sp>
+      <p:pic>
+        <p:nvPicPr>
+          <p:cNvPr id="7" name="Content Placeholder 6">
+            <a:extLst>
+              <a:ext uri="{FF2B5EF4-FFF2-40B4-BE49-F238E27FC236}">
+                <a16:creationId xmlns:a16="http://schemas.microsoft.com/office/drawing/2014/main" id="{3B5AC2C3-DE1F-E957-9229-55BA01FBDF77}"/>
+              </a:ext>
+            </a:extLst>
+          </p:cNvPr>
+          <p:cNvPicPr>
+            <a:picLocks noGrp="1" noChangeAspect="1"/>
+          </p:cNvPicPr>
+          <p:nvPr>
+            <p:ph idx="1"/>
+          </p:nvPr>
+        </p:nvPicPr>
+        <p:blipFill>
+          <a:blip r:embed="rId2"/>
+          <a:stretch>
+            <a:fillRect/>
+          </a:stretch>
+        </p:blipFill>
+        <p:spPr>
+          <a:xfrm>
+            <a:off x="1582646" y="1412875"/>
+            <a:ext cx="8925107" cy="4595813"/>
+          </a:xfrm>
+        </p:spPr>
+      </p:pic>
+      <p:sp>
+        <p:nvSpPr>
+          <p:cNvPr id="4" name="Footer Placeholder 3">
+            <a:extLst>
+              <a:ext uri="{FF2B5EF4-FFF2-40B4-BE49-F238E27FC236}">
+                <a16:creationId xmlns:a16="http://schemas.microsoft.com/office/drawing/2014/main" id="{9740D92A-82CE-2935-D906-7EE27C8852C5}"/>
+              </a:ext>
+            </a:extLst>
+          </p:cNvPr>
+          <p:cNvSpPr>
+            <a:spLocks noGrp="1"/>
+          </p:cNvSpPr>
+          <p:nvPr>
+            <p:ph type="ftr" sz="quarter" idx="11"/>
+          </p:nvPr>
+        </p:nvSpPr>
+        <p:spPr/>
+        <p:txBody>
+          <a:bodyPr/>
+          <a:lstStyle/>
+          <a:p>
+            <a:r>
+              <a:rPr lang="en-US"/>
+              <a:t>Progress Update</a:t>
+            </a:r>
+            <a:endParaRPr lang="en-US" dirty="0"/>
+          </a:p>
+        </p:txBody>
+      </p:sp>
+      <p:sp>
+        <p:nvSpPr>
+          <p:cNvPr id="5" name="Slide Number Placeholder 4">
+            <a:extLst>
+              <a:ext uri="{FF2B5EF4-FFF2-40B4-BE49-F238E27FC236}">
+                <a16:creationId xmlns:a16="http://schemas.microsoft.com/office/drawing/2014/main" id="{180996FC-C0AB-2279-A250-031D51BB29B8}"/>
+              </a:ext>
+            </a:extLst>
+          </p:cNvPr>
+          <p:cNvSpPr>
+            <a:spLocks noGrp="1"/>
+          </p:cNvSpPr>
+          <p:nvPr>
+            <p:ph type="sldNum" sz="quarter" idx="12"/>
+          </p:nvPr>
+        </p:nvSpPr>
+        <p:spPr/>
+        <p:txBody>
+          <a:bodyPr/>
+          <a:lstStyle/>
+          <a:p>
+            <a:r>
+              <a:rPr lang="en-US"/>
+              <a:t>PAGE  </a:t>
+            </a:r>
+            <a:fld id="{93005692-73BE-493E-93AB-ECD6027A7652}" type="slidenum">
+              <a:rPr lang="en-US" smtClean="0"/>
+              <a:pPr/>
+              <a:t>19</a:t>
+            </a:fld>
+            <a:endParaRPr lang="en-US" dirty="0"/>
+          </a:p>
+        </p:txBody>
+      </p:sp>
+    </p:spTree>
+    <p:extLst>
+      <p:ext uri="{BB962C8B-B14F-4D97-AF65-F5344CB8AC3E}">
+        <p14:creationId xmlns:p14="http://schemas.microsoft.com/office/powerpoint/2010/main" val="3216937315"/>
+      </p:ext>
+    </p:extLst>
+  </p:cSld>
+  <p:clrMapOvr>
+    <a:masterClrMapping/>
+  </p:clrMapOvr>
+  <p:transition spd="slow">
+    <p:push dir="u"/>
+  </p:transition>
+</p:sld>
+</file>
+
 <file path=ppt/slides/slide2.xml><?xml version="1.0" encoding="utf-8"?>
 <p:sld xmlns:a="http://schemas.openxmlformats.org/drawingml/2006/main" xmlns:r="http://schemas.openxmlformats.org/officeDocument/2006/relationships" xmlns:p="http://schemas.openxmlformats.org/presentationml/2006/main">
   <p:cSld>
@@ -12013,6 +12957,1515 @@
 </p:sld>
 </file>
 
+<file path=ppt/slides/slide20.xml><?xml version="1.0" encoding="utf-8"?>
+<p:sld xmlns:a="http://schemas.openxmlformats.org/drawingml/2006/main" xmlns:r="http://schemas.openxmlformats.org/officeDocument/2006/relationships" xmlns:p="http://schemas.openxmlformats.org/presentationml/2006/main">
+  <p:cSld>
+    <p:spTree>
+      <p:nvGrpSpPr>
+        <p:cNvPr id="1" name=""/>
+        <p:cNvGrpSpPr/>
+        <p:nvPr/>
+      </p:nvGrpSpPr>
+      <p:grpSpPr>
+        <a:xfrm>
+          <a:off x="0" y="0"/>
+          <a:ext cx="0" cy="0"/>
+          <a:chOff x="0" y="0"/>
+          <a:chExt cx="0" cy="0"/>
+        </a:xfrm>
+      </p:grpSpPr>
+      <p:sp>
+        <p:nvSpPr>
+          <p:cNvPr id="2" name="Title 1">
+            <a:extLst>
+              <a:ext uri="{FF2B5EF4-FFF2-40B4-BE49-F238E27FC236}">
+                <a16:creationId xmlns:a16="http://schemas.microsoft.com/office/drawing/2014/main" id="{5BD6F070-7A65-CE95-A0BF-4D6DE4BD0AC2}"/>
+              </a:ext>
+            </a:extLst>
+          </p:cNvPr>
+          <p:cNvSpPr>
+            <a:spLocks noGrp="1"/>
+          </p:cNvSpPr>
+          <p:nvPr>
+            <p:ph type="title"/>
+          </p:nvPr>
+        </p:nvSpPr>
+        <p:spPr/>
+        <p:txBody>
+          <a:bodyPr/>
+          <a:lstStyle/>
+          <a:p>
+            <a:endParaRPr lang="en-US"/>
+          </a:p>
+        </p:txBody>
+      </p:sp>
+      <p:pic>
+        <p:nvPicPr>
+          <p:cNvPr id="7" name="Content Placeholder 6">
+            <a:extLst>
+              <a:ext uri="{FF2B5EF4-FFF2-40B4-BE49-F238E27FC236}">
+                <a16:creationId xmlns:a16="http://schemas.microsoft.com/office/drawing/2014/main" id="{F644B829-5ED4-3D48-E7CA-C4C2D64B56DA}"/>
+              </a:ext>
+            </a:extLst>
+          </p:cNvPr>
+          <p:cNvPicPr>
+            <a:picLocks noGrp="1" noChangeAspect="1"/>
+          </p:cNvPicPr>
+          <p:nvPr>
+            <p:ph idx="1"/>
+          </p:nvPr>
+        </p:nvPicPr>
+        <p:blipFill>
+          <a:blip r:embed="rId2"/>
+          <a:stretch>
+            <a:fillRect/>
+          </a:stretch>
+        </p:blipFill>
+        <p:spPr>
+          <a:xfrm>
+            <a:off x="3342732" y="1412875"/>
+            <a:ext cx="5404935" cy="4595813"/>
+          </a:xfrm>
+        </p:spPr>
+      </p:pic>
+      <p:sp>
+        <p:nvSpPr>
+          <p:cNvPr id="4" name="Footer Placeholder 3">
+            <a:extLst>
+              <a:ext uri="{FF2B5EF4-FFF2-40B4-BE49-F238E27FC236}">
+                <a16:creationId xmlns:a16="http://schemas.microsoft.com/office/drawing/2014/main" id="{C37D7837-3AB5-8CEA-7A2F-2F116AF963AE}"/>
+              </a:ext>
+            </a:extLst>
+          </p:cNvPr>
+          <p:cNvSpPr>
+            <a:spLocks noGrp="1"/>
+          </p:cNvSpPr>
+          <p:nvPr>
+            <p:ph type="ftr" sz="quarter" idx="11"/>
+          </p:nvPr>
+        </p:nvSpPr>
+        <p:spPr/>
+        <p:txBody>
+          <a:bodyPr/>
+          <a:lstStyle/>
+          <a:p>
+            <a:r>
+              <a:rPr lang="en-US"/>
+              <a:t>Progress Update</a:t>
+            </a:r>
+            <a:endParaRPr lang="en-US" dirty="0"/>
+          </a:p>
+        </p:txBody>
+      </p:sp>
+      <p:sp>
+        <p:nvSpPr>
+          <p:cNvPr id="5" name="Slide Number Placeholder 4">
+            <a:extLst>
+              <a:ext uri="{FF2B5EF4-FFF2-40B4-BE49-F238E27FC236}">
+                <a16:creationId xmlns:a16="http://schemas.microsoft.com/office/drawing/2014/main" id="{8B84E9DD-382E-DE67-55EE-FF12629440A4}"/>
+              </a:ext>
+            </a:extLst>
+          </p:cNvPr>
+          <p:cNvSpPr>
+            <a:spLocks noGrp="1"/>
+          </p:cNvSpPr>
+          <p:nvPr>
+            <p:ph type="sldNum" sz="quarter" idx="12"/>
+          </p:nvPr>
+        </p:nvSpPr>
+        <p:spPr/>
+        <p:txBody>
+          <a:bodyPr/>
+          <a:lstStyle/>
+          <a:p>
+            <a:r>
+              <a:rPr lang="en-US"/>
+              <a:t>PAGE  </a:t>
+            </a:r>
+            <a:fld id="{93005692-73BE-493E-93AB-ECD6027A7652}" type="slidenum">
+              <a:rPr lang="en-US" smtClean="0"/>
+              <a:pPr/>
+              <a:t>20</a:t>
+            </a:fld>
+            <a:endParaRPr lang="en-US" dirty="0"/>
+          </a:p>
+        </p:txBody>
+      </p:sp>
+    </p:spTree>
+    <p:extLst>
+      <p:ext uri="{BB962C8B-B14F-4D97-AF65-F5344CB8AC3E}">
+        <p14:creationId xmlns:p14="http://schemas.microsoft.com/office/powerpoint/2010/main" val="3362857024"/>
+      </p:ext>
+    </p:extLst>
+  </p:cSld>
+  <p:clrMapOvr>
+    <a:masterClrMapping/>
+  </p:clrMapOvr>
+  <p:transition spd="slow">
+    <p:push dir="u"/>
+  </p:transition>
+</p:sld>
+</file>
+
+<file path=ppt/slides/slide21.xml><?xml version="1.0" encoding="utf-8"?>
+<p:sld xmlns:a="http://schemas.openxmlformats.org/drawingml/2006/main" xmlns:r="http://schemas.openxmlformats.org/officeDocument/2006/relationships" xmlns:p="http://schemas.openxmlformats.org/presentationml/2006/main">
+  <p:cSld>
+    <p:spTree>
+      <p:nvGrpSpPr>
+        <p:cNvPr id="1" name=""/>
+        <p:cNvGrpSpPr/>
+        <p:nvPr/>
+      </p:nvGrpSpPr>
+      <p:grpSpPr>
+        <a:xfrm>
+          <a:off x="0" y="0"/>
+          <a:ext cx="0" cy="0"/>
+          <a:chOff x="0" y="0"/>
+          <a:chExt cx="0" cy="0"/>
+        </a:xfrm>
+      </p:grpSpPr>
+      <p:sp>
+        <p:nvSpPr>
+          <p:cNvPr id="2" name="Title 1">
+            <a:extLst>
+              <a:ext uri="{FF2B5EF4-FFF2-40B4-BE49-F238E27FC236}">
+                <a16:creationId xmlns:a16="http://schemas.microsoft.com/office/drawing/2014/main" id="{B4E52F90-0D69-311D-9B93-841AAC2F5012}"/>
+              </a:ext>
+            </a:extLst>
+          </p:cNvPr>
+          <p:cNvSpPr>
+            <a:spLocks noGrp="1"/>
+          </p:cNvSpPr>
+          <p:nvPr>
+            <p:ph type="title"/>
+          </p:nvPr>
+        </p:nvSpPr>
+        <p:spPr/>
+        <p:txBody>
+          <a:bodyPr/>
+          <a:lstStyle/>
+          <a:p>
+            <a:r>
+              <a:rPr lang="en-US" dirty="0"/>
+              <a:t>Smaller coefficients, divide by b.</a:t>
+            </a:r>
+          </a:p>
+        </p:txBody>
+      </p:sp>
+      <p:pic>
+        <p:nvPicPr>
+          <p:cNvPr id="7" name="Content Placeholder 6">
+            <a:extLst>
+              <a:ext uri="{FF2B5EF4-FFF2-40B4-BE49-F238E27FC236}">
+                <a16:creationId xmlns:a16="http://schemas.microsoft.com/office/drawing/2014/main" id="{5BF6C762-0BE4-7E9D-5A67-AE1842F6B86E}"/>
+              </a:ext>
+            </a:extLst>
+          </p:cNvPr>
+          <p:cNvPicPr>
+            <a:picLocks noGrp="1" noChangeAspect="1"/>
+          </p:cNvPicPr>
+          <p:nvPr>
+            <p:ph idx="1"/>
+          </p:nvPr>
+        </p:nvPicPr>
+        <p:blipFill>
+          <a:blip r:embed="rId2"/>
+          <a:stretch>
+            <a:fillRect/>
+          </a:stretch>
+        </p:blipFill>
+        <p:spPr>
+          <a:xfrm>
+            <a:off x="1942236" y="1412875"/>
+            <a:ext cx="8205928" cy="4595813"/>
+          </a:xfrm>
+        </p:spPr>
+      </p:pic>
+      <p:sp>
+        <p:nvSpPr>
+          <p:cNvPr id="4" name="Footer Placeholder 3">
+            <a:extLst>
+              <a:ext uri="{FF2B5EF4-FFF2-40B4-BE49-F238E27FC236}">
+                <a16:creationId xmlns:a16="http://schemas.microsoft.com/office/drawing/2014/main" id="{0FC3ECF0-4053-9942-3A6C-0E17EDC7A936}"/>
+              </a:ext>
+            </a:extLst>
+          </p:cNvPr>
+          <p:cNvSpPr>
+            <a:spLocks noGrp="1"/>
+          </p:cNvSpPr>
+          <p:nvPr>
+            <p:ph type="ftr" sz="quarter" idx="11"/>
+          </p:nvPr>
+        </p:nvSpPr>
+        <p:spPr/>
+        <p:txBody>
+          <a:bodyPr/>
+          <a:lstStyle/>
+          <a:p>
+            <a:r>
+              <a:rPr lang="en-US"/>
+              <a:t>Progress Update</a:t>
+            </a:r>
+            <a:endParaRPr lang="en-US" dirty="0"/>
+          </a:p>
+        </p:txBody>
+      </p:sp>
+      <p:sp>
+        <p:nvSpPr>
+          <p:cNvPr id="5" name="Slide Number Placeholder 4">
+            <a:extLst>
+              <a:ext uri="{FF2B5EF4-FFF2-40B4-BE49-F238E27FC236}">
+                <a16:creationId xmlns:a16="http://schemas.microsoft.com/office/drawing/2014/main" id="{71529D11-FBA1-156F-C835-B0AC9F60F9DC}"/>
+              </a:ext>
+            </a:extLst>
+          </p:cNvPr>
+          <p:cNvSpPr>
+            <a:spLocks noGrp="1"/>
+          </p:cNvSpPr>
+          <p:nvPr>
+            <p:ph type="sldNum" sz="quarter" idx="12"/>
+          </p:nvPr>
+        </p:nvSpPr>
+        <p:spPr/>
+        <p:txBody>
+          <a:bodyPr/>
+          <a:lstStyle/>
+          <a:p>
+            <a:r>
+              <a:rPr lang="en-US"/>
+              <a:t>PAGE  </a:t>
+            </a:r>
+            <a:fld id="{93005692-73BE-493E-93AB-ECD6027A7652}" type="slidenum">
+              <a:rPr lang="en-US" smtClean="0"/>
+              <a:pPr/>
+              <a:t>21</a:t>
+            </a:fld>
+            <a:endParaRPr lang="en-US" dirty="0"/>
+          </a:p>
+        </p:txBody>
+      </p:sp>
+    </p:spTree>
+    <p:extLst>
+      <p:ext uri="{BB962C8B-B14F-4D97-AF65-F5344CB8AC3E}">
+        <p14:creationId xmlns:p14="http://schemas.microsoft.com/office/powerpoint/2010/main" val="293417976"/>
+      </p:ext>
+    </p:extLst>
+  </p:cSld>
+  <p:clrMapOvr>
+    <a:masterClrMapping/>
+  </p:clrMapOvr>
+  <p:transition spd="slow">
+    <p:push dir="u"/>
+  </p:transition>
+</p:sld>
+</file>
+
+<file path=ppt/slides/slide22.xml><?xml version="1.0" encoding="utf-8"?>
+<p:sld xmlns:a="http://schemas.openxmlformats.org/drawingml/2006/main" xmlns:r="http://schemas.openxmlformats.org/officeDocument/2006/relationships" xmlns:p="http://schemas.openxmlformats.org/presentationml/2006/main">
+  <p:cSld>
+    <p:spTree>
+      <p:nvGrpSpPr>
+        <p:cNvPr id="1" name=""/>
+        <p:cNvGrpSpPr/>
+        <p:nvPr/>
+      </p:nvGrpSpPr>
+      <p:grpSpPr>
+        <a:xfrm>
+          <a:off x="0" y="0"/>
+          <a:ext cx="0" cy="0"/>
+          <a:chOff x="0" y="0"/>
+          <a:chExt cx="0" cy="0"/>
+        </a:xfrm>
+      </p:grpSpPr>
+      <p:sp>
+        <p:nvSpPr>
+          <p:cNvPr id="2" name="Title 1">
+            <a:extLst>
+              <a:ext uri="{FF2B5EF4-FFF2-40B4-BE49-F238E27FC236}">
+                <a16:creationId xmlns:a16="http://schemas.microsoft.com/office/drawing/2014/main" id="{AD36F36F-0872-A98B-5006-171FA5BFD075}"/>
+              </a:ext>
+            </a:extLst>
+          </p:cNvPr>
+          <p:cNvSpPr>
+            <a:spLocks noGrp="1"/>
+          </p:cNvSpPr>
+          <p:nvPr>
+            <p:ph type="title"/>
+          </p:nvPr>
+        </p:nvSpPr>
+        <p:spPr/>
+        <p:txBody>
+          <a:bodyPr/>
+          <a:lstStyle/>
+          <a:p>
+            <a:r>
+              <a:rPr lang="en-US" dirty="0"/>
+              <a:t>Divide by the norm of A and B- geometric normalization (?)</a:t>
+            </a:r>
+          </a:p>
+        </p:txBody>
+      </p:sp>
+      <p:pic>
+        <p:nvPicPr>
+          <p:cNvPr id="7" name="Content Placeholder 6">
+            <a:extLst>
+              <a:ext uri="{FF2B5EF4-FFF2-40B4-BE49-F238E27FC236}">
+                <a16:creationId xmlns:a16="http://schemas.microsoft.com/office/drawing/2014/main" id="{011D9E63-158B-6B62-3834-FA797B7A9C38}"/>
+              </a:ext>
+            </a:extLst>
+          </p:cNvPr>
+          <p:cNvPicPr>
+            <a:picLocks noGrp="1" noChangeAspect="1"/>
+          </p:cNvPicPr>
+          <p:nvPr>
+            <p:ph idx="1"/>
+          </p:nvPr>
+        </p:nvPicPr>
+        <p:blipFill>
+          <a:blip r:embed="rId2"/>
+          <a:stretch>
+            <a:fillRect/>
+          </a:stretch>
+        </p:blipFill>
+        <p:spPr>
+          <a:xfrm>
+            <a:off x="1890399" y="1412875"/>
+            <a:ext cx="8309601" cy="4595813"/>
+          </a:xfrm>
+        </p:spPr>
+      </p:pic>
+      <p:sp>
+        <p:nvSpPr>
+          <p:cNvPr id="4" name="Footer Placeholder 3">
+            <a:extLst>
+              <a:ext uri="{FF2B5EF4-FFF2-40B4-BE49-F238E27FC236}">
+                <a16:creationId xmlns:a16="http://schemas.microsoft.com/office/drawing/2014/main" id="{C331FDC9-6CC1-4E17-282A-401AE39B806C}"/>
+              </a:ext>
+            </a:extLst>
+          </p:cNvPr>
+          <p:cNvSpPr>
+            <a:spLocks noGrp="1"/>
+          </p:cNvSpPr>
+          <p:nvPr>
+            <p:ph type="ftr" sz="quarter" idx="11"/>
+          </p:nvPr>
+        </p:nvSpPr>
+        <p:spPr/>
+        <p:txBody>
+          <a:bodyPr/>
+          <a:lstStyle/>
+          <a:p>
+            <a:r>
+              <a:rPr lang="en-US"/>
+              <a:t>Progress Update</a:t>
+            </a:r>
+            <a:endParaRPr lang="en-US" dirty="0"/>
+          </a:p>
+        </p:txBody>
+      </p:sp>
+      <p:sp>
+        <p:nvSpPr>
+          <p:cNvPr id="5" name="Slide Number Placeholder 4">
+            <a:extLst>
+              <a:ext uri="{FF2B5EF4-FFF2-40B4-BE49-F238E27FC236}">
+                <a16:creationId xmlns:a16="http://schemas.microsoft.com/office/drawing/2014/main" id="{07B9289D-B147-A918-0AF7-7A41CB7B880F}"/>
+              </a:ext>
+            </a:extLst>
+          </p:cNvPr>
+          <p:cNvSpPr>
+            <a:spLocks noGrp="1"/>
+          </p:cNvSpPr>
+          <p:nvPr>
+            <p:ph type="sldNum" sz="quarter" idx="12"/>
+          </p:nvPr>
+        </p:nvSpPr>
+        <p:spPr/>
+        <p:txBody>
+          <a:bodyPr/>
+          <a:lstStyle/>
+          <a:p>
+            <a:r>
+              <a:rPr lang="en-US"/>
+              <a:t>PAGE  </a:t>
+            </a:r>
+            <a:fld id="{93005692-73BE-493E-93AB-ECD6027A7652}" type="slidenum">
+              <a:rPr lang="en-US" smtClean="0"/>
+              <a:pPr/>
+              <a:t>22</a:t>
+            </a:fld>
+            <a:endParaRPr lang="en-US" dirty="0"/>
+          </a:p>
+        </p:txBody>
+      </p:sp>
+    </p:spTree>
+    <p:extLst>
+      <p:ext uri="{BB962C8B-B14F-4D97-AF65-F5344CB8AC3E}">
+        <p14:creationId xmlns:p14="http://schemas.microsoft.com/office/powerpoint/2010/main" val="1135246643"/>
+      </p:ext>
+    </p:extLst>
+  </p:cSld>
+  <p:clrMapOvr>
+    <a:masterClrMapping/>
+  </p:clrMapOvr>
+  <p:transition spd="slow">
+    <p:push dir="u"/>
+  </p:transition>
+</p:sld>
+</file>
+
+<file path=ppt/slides/slide23.xml><?xml version="1.0" encoding="utf-8"?>
+<p:sld xmlns:a="http://schemas.openxmlformats.org/drawingml/2006/main" xmlns:r="http://schemas.openxmlformats.org/officeDocument/2006/relationships" xmlns:p="http://schemas.openxmlformats.org/presentationml/2006/main">
+  <p:cSld>
+    <p:spTree>
+      <p:nvGrpSpPr>
+        <p:cNvPr id="1" name=""/>
+        <p:cNvGrpSpPr/>
+        <p:nvPr/>
+      </p:nvGrpSpPr>
+      <p:grpSpPr>
+        <a:xfrm>
+          <a:off x="0" y="0"/>
+          <a:ext cx="0" cy="0"/>
+          <a:chOff x="0" y="0"/>
+          <a:chExt cx="0" cy="0"/>
+        </a:xfrm>
+      </p:grpSpPr>
+      <p:sp>
+        <p:nvSpPr>
+          <p:cNvPr id="2" name="Title 1">
+            <a:extLst>
+              <a:ext uri="{FF2B5EF4-FFF2-40B4-BE49-F238E27FC236}">
+                <a16:creationId xmlns:a16="http://schemas.microsoft.com/office/drawing/2014/main" id="{4FE7057A-5C28-2847-9D1D-1FCFDDF05EF0}"/>
+              </a:ext>
+            </a:extLst>
+          </p:cNvPr>
+          <p:cNvSpPr>
+            <a:spLocks noGrp="1"/>
+          </p:cNvSpPr>
+          <p:nvPr>
+            <p:ph type="title"/>
+          </p:nvPr>
+        </p:nvSpPr>
+        <p:spPr/>
+        <p:txBody>
+          <a:bodyPr/>
+          <a:lstStyle/>
+          <a:p>
+            <a:endParaRPr lang="en-US"/>
+          </a:p>
+        </p:txBody>
+      </p:sp>
+      <p:pic>
+        <p:nvPicPr>
+          <p:cNvPr id="7" name="Content Placeholder 6">
+            <a:extLst>
+              <a:ext uri="{FF2B5EF4-FFF2-40B4-BE49-F238E27FC236}">
+                <a16:creationId xmlns:a16="http://schemas.microsoft.com/office/drawing/2014/main" id="{F58EBA4B-AC5F-3875-D553-B2A027D397AC}"/>
+              </a:ext>
+            </a:extLst>
+          </p:cNvPr>
+          <p:cNvPicPr>
+            <a:picLocks noGrp="1" noChangeAspect="1"/>
+          </p:cNvPicPr>
+          <p:nvPr>
+            <p:ph idx="1"/>
+          </p:nvPr>
+        </p:nvPicPr>
+        <p:blipFill>
+          <a:blip r:embed="rId2"/>
+          <a:stretch>
+            <a:fillRect/>
+          </a:stretch>
+        </p:blipFill>
+        <p:spPr>
+          <a:xfrm>
+            <a:off x="2549240" y="1412875"/>
+            <a:ext cx="6991920" cy="4595813"/>
+          </a:xfrm>
+        </p:spPr>
+      </p:pic>
+      <p:sp>
+        <p:nvSpPr>
+          <p:cNvPr id="4" name="Footer Placeholder 3">
+            <a:extLst>
+              <a:ext uri="{FF2B5EF4-FFF2-40B4-BE49-F238E27FC236}">
+                <a16:creationId xmlns:a16="http://schemas.microsoft.com/office/drawing/2014/main" id="{56EC94EF-442D-1D1F-A230-4199EACD2F73}"/>
+              </a:ext>
+            </a:extLst>
+          </p:cNvPr>
+          <p:cNvSpPr>
+            <a:spLocks noGrp="1"/>
+          </p:cNvSpPr>
+          <p:nvPr>
+            <p:ph type="ftr" sz="quarter" idx="11"/>
+          </p:nvPr>
+        </p:nvSpPr>
+        <p:spPr/>
+        <p:txBody>
+          <a:bodyPr/>
+          <a:lstStyle/>
+          <a:p>
+            <a:r>
+              <a:rPr lang="en-US"/>
+              <a:t>Progress Update</a:t>
+            </a:r>
+            <a:endParaRPr lang="en-US" dirty="0"/>
+          </a:p>
+        </p:txBody>
+      </p:sp>
+      <p:sp>
+        <p:nvSpPr>
+          <p:cNvPr id="5" name="Slide Number Placeholder 4">
+            <a:extLst>
+              <a:ext uri="{FF2B5EF4-FFF2-40B4-BE49-F238E27FC236}">
+                <a16:creationId xmlns:a16="http://schemas.microsoft.com/office/drawing/2014/main" id="{733BF468-79AE-2949-2B35-AEFDD8045755}"/>
+              </a:ext>
+            </a:extLst>
+          </p:cNvPr>
+          <p:cNvSpPr>
+            <a:spLocks noGrp="1"/>
+          </p:cNvSpPr>
+          <p:nvPr>
+            <p:ph type="sldNum" sz="quarter" idx="12"/>
+          </p:nvPr>
+        </p:nvSpPr>
+        <p:spPr/>
+        <p:txBody>
+          <a:bodyPr/>
+          <a:lstStyle/>
+          <a:p>
+            <a:r>
+              <a:rPr lang="en-US"/>
+              <a:t>PAGE  </a:t>
+            </a:r>
+            <a:fld id="{93005692-73BE-493E-93AB-ECD6027A7652}" type="slidenum">
+              <a:rPr lang="en-US" smtClean="0"/>
+              <a:pPr/>
+              <a:t>23</a:t>
+            </a:fld>
+            <a:endParaRPr lang="en-US" dirty="0"/>
+          </a:p>
+        </p:txBody>
+      </p:sp>
+    </p:spTree>
+    <p:extLst>
+      <p:ext uri="{BB962C8B-B14F-4D97-AF65-F5344CB8AC3E}">
+        <p14:creationId xmlns:p14="http://schemas.microsoft.com/office/powerpoint/2010/main" val="3285368354"/>
+      </p:ext>
+    </p:extLst>
+  </p:cSld>
+  <p:clrMapOvr>
+    <a:masterClrMapping/>
+  </p:clrMapOvr>
+  <p:transition spd="slow">
+    <p:push dir="u"/>
+  </p:transition>
+</p:sld>
+</file>
+
+<file path=ppt/slides/slide24.xml><?xml version="1.0" encoding="utf-8"?>
+<p:sld xmlns:a="http://schemas.openxmlformats.org/drawingml/2006/main" xmlns:r="http://schemas.openxmlformats.org/officeDocument/2006/relationships" xmlns:p="http://schemas.openxmlformats.org/presentationml/2006/main">
+  <p:cSld>
+    <p:spTree>
+      <p:nvGrpSpPr>
+        <p:cNvPr id="1" name=""/>
+        <p:cNvGrpSpPr/>
+        <p:nvPr/>
+      </p:nvGrpSpPr>
+      <p:grpSpPr>
+        <a:xfrm>
+          <a:off x="0" y="0"/>
+          <a:ext cx="0" cy="0"/>
+          <a:chOff x="0" y="0"/>
+          <a:chExt cx="0" cy="0"/>
+        </a:xfrm>
+      </p:grpSpPr>
+      <p:sp>
+        <p:nvSpPr>
+          <p:cNvPr id="2" name="Title 1">
+            <a:extLst>
+              <a:ext uri="{FF2B5EF4-FFF2-40B4-BE49-F238E27FC236}">
+                <a16:creationId xmlns:a16="http://schemas.microsoft.com/office/drawing/2014/main" id="{9650C759-79F7-FF75-813C-ACABB323BB7E}"/>
+              </a:ext>
+            </a:extLst>
+          </p:cNvPr>
+          <p:cNvSpPr>
+            <a:spLocks noGrp="1"/>
+          </p:cNvSpPr>
+          <p:nvPr>
+            <p:ph type="title"/>
+          </p:nvPr>
+        </p:nvSpPr>
+        <p:spPr/>
+        <p:txBody>
+          <a:bodyPr/>
+          <a:lstStyle/>
+          <a:p>
+            <a:endParaRPr lang="en-US"/>
+          </a:p>
+        </p:txBody>
+      </p:sp>
+      <p:pic>
+        <p:nvPicPr>
+          <p:cNvPr id="7" name="Content Placeholder 6">
+            <a:extLst>
+              <a:ext uri="{FF2B5EF4-FFF2-40B4-BE49-F238E27FC236}">
+                <a16:creationId xmlns:a16="http://schemas.microsoft.com/office/drawing/2014/main" id="{7959697A-B210-93A8-25DB-62395826AAA3}"/>
+              </a:ext>
+            </a:extLst>
+          </p:cNvPr>
+          <p:cNvPicPr>
+            <a:picLocks noGrp="1" noChangeAspect="1"/>
+          </p:cNvPicPr>
+          <p:nvPr>
+            <p:ph idx="1"/>
+          </p:nvPr>
+        </p:nvPicPr>
+        <p:blipFill>
+          <a:blip r:embed="rId2"/>
+          <a:stretch>
+            <a:fillRect/>
+          </a:stretch>
+        </p:blipFill>
+        <p:spPr>
+          <a:xfrm>
+            <a:off x="1568289" y="1412875"/>
+            <a:ext cx="8953822" cy="4595813"/>
+          </a:xfrm>
+        </p:spPr>
+      </p:pic>
+      <p:sp>
+        <p:nvSpPr>
+          <p:cNvPr id="4" name="Footer Placeholder 3">
+            <a:extLst>
+              <a:ext uri="{FF2B5EF4-FFF2-40B4-BE49-F238E27FC236}">
+                <a16:creationId xmlns:a16="http://schemas.microsoft.com/office/drawing/2014/main" id="{0175D429-A022-6F92-9544-1638922E05C9}"/>
+              </a:ext>
+            </a:extLst>
+          </p:cNvPr>
+          <p:cNvSpPr>
+            <a:spLocks noGrp="1"/>
+          </p:cNvSpPr>
+          <p:nvPr>
+            <p:ph type="ftr" sz="quarter" idx="11"/>
+          </p:nvPr>
+        </p:nvSpPr>
+        <p:spPr/>
+        <p:txBody>
+          <a:bodyPr/>
+          <a:lstStyle/>
+          <a:p>
+            <a:r>
+              <a:rPr lang="en-US"/>
+              <a:t>Progress Update</a:t>
+            </a:r>
+            <a:endParaRPr lang="en-US" dirty="0"/>
+          </a:p>
+        </p:txBody>
+      </p:sp>
+      <p:sp>
+        <p:nvSpPr>
+          <p:cNvPr id="5" name="Slide Number Placeholder 4">
+            <a:extLst>
+              <a:ext uri="{FF2B5EF4-FFF2-40B4-BE49-F238E27FC236}">
+                <a16:creationId xmlns:a16="http://schemas.microsoft.com/office/drawing/2014/main" id="{5490F0A0-F8AA-EFB1-73C7-BF4C613D8600}"/>
+              </a:ext>
+            </a:extLst>
+          </p:cNvPr>
+          <p:cNvSpPr>
+            <a:spLocks noGrp="1"/>
+          </p:cNvSpPr>
+          <p:nvPr>
+            <p:ph type="sldNum" sz="quarter" idx="12"/>
+          </p:nvPr>
+        </p:nvSpPr>
+        <p:spPr/>
+        <p:txBody>
+          <a:bodyPr/>
+          <a:lstStyle/>
+          <a:p>
+            <a:r>
+              <a:rPr lang="en-US"/>
+              <a:t>PAGE  </a:t>
+            </a:r>
+            <a:fld id="{93005692-73BE-493E-93AB-ECD6027A7652}" type="slidenum">
+              <a:rPr lang="en-US" smtClean="0"/>
+              <a:pPr/>
+              <a:t>24</a:t>
+            </a:fld>
+            <a:endParaRPr lang="en-US" dirty="0"/>
+          </a:p>
+        </p:txBody>
+      </p:sp>
+    </p:spTree>
+    <p:extLst>
+      <p:ext uri="{BB962C8B-B14F-4D97-AF65-F5344CB8AC3E}">
+        <p14:creationId xmlns:p14="http://schemas.microsoft.com/office/powerpoint/2010/main" val="3040372527"/>
+      </p:ext>
+    </p:extLst>
+  </p:cSld>
+  <p:clrMapOvr>
+    <a:masterClrMapping/>
+  </p:clrMapOvr>
+  <p:transition spd="slow">
+    <p:push dir="u"/>
+  </p:transition>
+</p:sld>
+</file>
+
+<file path=ppt/slides/slide25.xml><?xml version="1.0" encoding="utf-8"?>
+<p:sld xmlns:a="http://schemas.openxmlformats.org/drawingml/2006/main" xmlns:r="http://schemas.openxmlformats.org/officeDocument/2006/relationships" xmlns:p="http://schemas.openxmlformats.org/presentationml/2006/main">
+  <p:cSld>
+    <p:spTree>
+      <p:nvGrpSpPr>
+        <p:cNvPr id="1" name=""/>
+        <p:cNvGrpSpPr/>
+        <p:nvPr/>
+      </p:nvGrpSpPr>
+      <p:grpSpPr>
+        <a:xfrm>
+          <a:off x="0" y="0"/>
+          <a:ext cx="0" cy="0"/>
+          <a:chOff x="0" y="0"/>
+          <a:chExt cx="0" cy="0"/>
+        </a:xfrm>
+      </p:grpSpPr>
+      <p:sp>
+        <p:nvSpPr>
+          <p:cNvPr id="2" name="Title 1">
+            <a:extLst>
+              <a:ext uri="{FF2B5EF4-FFF2-40B4-BE49-F238E27FC236}">
+                <a16:creationId xmlns:a16="http://schemas.microsoft.com/office/drawing/2014/main" id="{29B5DA29-ABAA-7884-1C1D-467A5F0A14D2}"/>
+              </a:ext>
+            </a:extLst>
+          </p:cNvPr>
+          <p:cNvSpPr>
+            <a:spLocks noGrp="1"/>
+          </p:cNvSpPr>
+          <p:nvPr>
+            <p:ph type="title"/>
+          </p:nvPr>
+        </p:nvSpPr>
+        <p:spPr/>
+        <p:txBody>
+          <a:bodyPr/>
+          <a:lstStyle/>
+          <a:p>
+            <a:endParaRPr lang="en-US"/>
+          </a:p>
+        </p:txBody>
+      </p:sp>
+      <p:pic>
+        <p:nvPicPr>
+          <p:cNvPr id="7" name="Content Placeholder 6">
+            <a:extLst>
+              <a:ext uri="{FF2B5EF4-FFF2-40B4-BE49-F238E27FC236}">
+                <a16:creationId xmlns:a16="http://schemas.microsoft.com/office/drawing/2014/main" id="{4E9C2506-01E3-D280-26D9-388498E36FF9}"/>
+              </a:ext>
+            </a:extLst>
+          </p:cNvPr>
+          <p:cNvPicPr>
+            <a:picLocks noGrp="1" noChangeAspect="1"/>
+          </p:cNvPicPr>
+          <p:nvPr>
+            <p:ph idx="1"/>
+          </p:nvPr>
+        </p:nvPicPr>
+        <p:blipFill>
+          <a:blip r:embed="rId2"/>
+          <a:stretch>
+            <a:fillRect/>
+          </a:stretch>
+        </p:blipFill>
+        <p:spPr>
+          <a:xfrm>
+            <a:off x="1550840" y="1412875"/>
+            <a:ext cx="8988720" cy="4595813"/>
+          </a:xfrm>
+        </p:spPr>
+      </p:pic>
+      <p:sp>
+        <p:nvSpPr>
+          <p:cNvPr id="4" name="Footer Placeholder 3">
+            <a:extLst>
+              <a:ext uri="{FF2B5EF4-FFF2-40B4-BE49-F238E27FC236}">
+                <a16:creationId xmlns:a16="http://schemas.microsoft.com/office/drawing/2014/main" id="{37DBB9D3-7884-4E63-F331-30C12E0E16DB}"/>
+              </a:ext>
+            </a:extLst>
+          </p:cNvPr>
+          <p:cNvSpPr>
+            <a:spLocks noGrp="1"/>
+          </p:cNvSpPr>
+          <p:nvPr>
+            <p:ph type="ftr" sz="quarter" idx="11"/>
+          </p:nvPr>
+        </p:nvSpPr>
+        <p:spPr/>
+        <p:txBody>
+          <a:bodyPr/>
+          <a:lstStyle/>
+          <a:p>
+            <a:r>
+              <a:rPr lang="en-US"/>
+              <a:t>Progress Update</a:t>
+            </a:r>
+            <a:endParaRPr lang="en-US" dirty="0"/>
+          </a:p>
+        </p:txBody>
+      </p:sp>
+      <p:sp>
+        <p:nvSpPr>
+          <p:cNvPr id="5" name="Slide Number Placeholder 4">
+            <a:extLst>
+              <a:ext uri="{FF2B5EF4-FFF2-40B4-BE49-F238E27FC236}">
+                <a16:creationId xmlns:a16="http://schemas.microsoft.com/office/drawing/2014/main" id="{1D9DD9AE-EA63-E794-5C27-4ACEC8BE3DE0}"/>
+              </a:ext>
+            </a:extLst>
+          </p:cNvPr>
+          <p:cNvSpPr>
+            <a:spLocks noGrp="1"/>
+          </p:cNvSpPr>
+          <p:nvPr>
+            <p:ph type="sldNum" sz="quarter" idx="12"/>
+          </p:nvPr>
+        </p:nvSpPr>
+        <p:spPr/>
+        <p:txBody>
+          <a:bodyPr/>
+          <a:lstStyle/>
+          <a:p>
+            <a:r>
+              <a:rPr lang="en-US"/>
+              <a:t>PAGE  </a:t>
+            </a:r>
+            <a:fld id="{93005692-73BE-493E-93AB-ECD6027A7652}" type="slidenum">
+              <a:rPr lang="en-US" smtClean="0"/>
+              <a:pPr/>
+              <a:t>25</a:t>
+            </a:fld>
+            <a:endParaRPr lang="en-US" dirty="0"/>
+          </a:p>
+        </p:txBody>
+      </p:sp>
+    </p:spTree>
+    <p:extLst>
+      <p:ext uri="{BB962C8B-B14F-4D97-AF65-F5344CB8AC3E}">
+        <p14:creationId xmlns:p14="http://schemas.microsoft.com/office/powerpoint/2010/main" val="650255665"/>
+      </p:ext>
+    </p:extLst>
+  </p:cSld>
+  <p:clrMapOvr>
+    <a:masterClrMapping/>
+  </p:clrMapOvr>
+  <p:transition spd="slow">
+    <p:push dir="u"/>
+  </p:transition>
+</p:sld>
+</file>
+
+<file path=ppt/slides/slide26.xml><?xml version="1.0" encoding="utf-8"?>
+<p:sld xmlns:a="http://schemas.openxmlformats.org/drawingml/2006/main" xmlns:r="http://schemas.openxmlformats.org/officeDocument/2006/relationships" xmlns:p="http://schemas.openxmlformats.org/presentationml/2006/main">
+  <p:cSld>
+    <p:spTree>
+      <p:nvGrpSpPr>
+        <p:cNvPr id="1" name=""/>
+        <p:cNvGrpSpPr/>
+        <p:nvPr/>
+      </p:nvGrpSpPr>
+      <p:grpSpPr>
+        <a:xfrm>
+          <a:off x="0" y="0"/>
+          <a:ext cx="0" cy="0"/>
+          <a:chOff x="0" y="0"/>
+          <a:chExt cx="0" cy="0"/>
+        </a:xfrm>
+      </p:grpSpPr>
+      <p:sp>
+        <p:nvSpPr>
+          <p:cNvPr id="2" name="Title 1">
+            <a:extLst>
+              <a:ext uri="{FF2B5EF4-FFF2-40B4-BE49-F238E27FC236}">
+                <a16:creationId xmlns:a16="http://schemas.microsoft.com/office/drawing/2014/main" id="{FEDCEC82-43D6-5D53-313A-D8895133099F}"/>
+              </a:ext>
+            </a:extLst>
+          </p:cNvPr>
+          <p:cNvSpPr>
+            <a:spLocks noGrp="1"/>
+          </p:cNvSpPr>
+          <p:nvPr>
+            <p:ph type="title"/>
+          </p:nvPr>
+        </p:nvSpPr>
+        <p:spPr/>
+        <p:txBody>
+          <a:bodyPr/>
+          <a:lstStyle/>
+          <a:p>
+            <a:endParaRPr lang="en-US"/>
+          </a:p>
+        </p:txBody>
+      </p:sp>
+      <p:pic>
+        <p:nvPicPr>
+          <p:cNvPr id="7" name="Content Placeholder 6">
+            <a:extLst>
+              <a:ext uri="{FF2B5EF4-FFF2-40B4-BE49-F238E27FC236}">
+                <a16:creationId xmlns:a16="http://schemas.microsoft.com/office/drawing/2014/main" id="{2E9A76A2-97F2-BDFC-A189-DAB38CB20668}"/>
+              </a:ext>
+            </a:extLst>
+          </p:cNvPr>
+          <p:cNvPicPr>
+            <a:picLocks noGrp="1" noChangeAspect="1"/>
+          </p:cNvPicPr>
+          <p:nvPr>
+            <p:ph idx="1"/>
+          </p:nvPr>
+        </p:nvPicPr>
+        <p:blipFill>
+          <a:blip r:embed="rId2"/>
+          <a:stretch>
+            <a:fillRect/>
+          </a:stretch>
+        </p:blipFill>
+        <p:spPr>
+          <a:xfrm>
+            <a:off x="1517567" y="1412875"/>
+            <a:ext cx="9055266" cy="4595813"/>
+          </a:xfrm>
+        </p:spPr>
+      </p:pic>
+      <p:sp>
+        <p:nvSpPr>
+          <p:cNvPr id="4" name="Footer Placeholder 3">
+            <a:extLst>
+              <a:ext uri="{FF2B5EF4-FFF2-40B4-BE49-F238E27FC236}">
+                <a16:creationId xmlns:a16="http://schemas.microsoft.com/office/drawing/2014/main" id="{67719C51-FA7A-D180-6189-07A3F0ADE546}"/>
+              </a:ext>
+            </a:extLst>
+          </p:cNvPr>
+          <p:cNvSpPr>
+            <a:spLocks noGrp="1"/>
+          </p:cNvSpPr>
+          <p:nvPr>
+            <p:ph type="ftr" sz="quarter" idx="11"/>
+          </p:nvPr>
+        </p:nvSpPr>
+        <p:spPr/>
+        <p:txBody>
+          <a:bodyPr/>
+          <a:lstStyle/>
+          <a:p>
+            <a:r>
+              <a:rPr lang="en-US"/>
+              <a:t>Progress Update</a:t>
+            </a:r>
+            <a:endParaRPr lang="en-US" dirty="0"/>
+          </a:p>
+        </p:txBody>
+      </p:sp>
+      <p:sp>
+        <p:nvSpPr>
+          <p:cNvPr id="5" name="Slide Number Placeholder 4">
+            <a:extLst>
+              <a:ext uri="{FF2B5EF4-FFF2-40B4-BE49-F238E27FC236}">
+                <a16:creationId xmlns:a16="http://schemas.microsoft.com/office/drawing/2014/main" id="{107D1BFB-025F-D1DA-68BD-FD749A36D6AA}"/>
+              </a:ext>
+            </a:extLst>
+          </p:cNvPr>
+          <p:cNvSpPr>
+            <a:spLocks noGrp="1"/>
+          </p:cNvSpPr>
+          <p:nvPr>
+            <p:ph type="sldNum" sz="quarter" idx="12"/>
+          </p:nvPr>
+        </p:nvSpPr>
+        <p:spPr/>
+        <p:txBody>
+          <a:bodyPr/>
+          <a:lstStyle/>
+          <a:p>
+            <a:r>
+              <a:rPr lang="en-US"/>
+              <a:t>PAGE  </a:t>
+            </a:r>
+            <a:fld id="{93005692-73BE-493E-93AB-ECD6027A7652}" type="slidenum">
+              <a:rPr lang="en-US" smtClean="0"/>
+              <a:pPr/>
+              <a:t>26</a:t>
+            </a:fld>
+            <a:endParaRPr lang="en-US" dirty="0"/>
+          </a:p>
+        </p:txBody>
+      </p:sp>
+    </p:spTree>
+    <p:extLst>
+      <p:ext uri="{BB962C8B-B14F-4D97-AF65-F5344CB8AC3E}">
+        <p14:creationId xmlns:p14="http://schemas.microsoft.com/office/powerpoint/2010/main" val="4066243896"/>
+      </p:ext>
+    </p:extLst>
+  </p:cSld>
+  <p:clrMapOvr>
+    <a:masterClrMapping/>
+  </p:clrMapOvr>
+  <p:transition spd="slow">
+    <p:push dir="u"/>
+  </p:transition>
+</p:sld>
+</file>
+
+<file path=ppt/slides/slide27.xml><?xml version="1.0" encoding="utf-8"?>
+<p:sld xmlns:a="http://schemas.openxmlformats.org/drawingml/2006/main" xmlns:r="http://schemas.openxmlformats.org/officeDocument/2006/relationships" xmlns:p="http://schemas.openxmlformats.org/presentationml/2006/main">
+  <p:cSld>
+    <p:spTree>
+      <p:nvGrpSpPr>
+        <p:cNvPr id="1" name=""/>
+        <p:cNvGrpSpPr/>
+        <p:nvPr/>
+      </p:nvGrpSpPr>
+      <p:grpSpPr>
+        <a:xfrm>
+          <a:off x="0" y="0"/>
+          <a:ext cx="0" cy="0"/>
+          <a:chOff x="0" y="0"/>
+          <a:chExt cx="0" cy="0"/>
+        </a:xfrm>
+      </p:grpSpPr>
+      <p:sp>
+        <p:nvSpPr>
+          <p:cNvPr id="2" name="Title 1">
+            <a:extLst>
+              <a:ext uri="{FF2B5EF4-FFF2-40B4-BE49-F238E27FC236}">
+                <a16:creationId xmlns:a16="http://schemas.microsoft.com/office/drawing/2014/main" id="{219D7466-55B7-BEBD-9CEB-809CAC5C9A13}"/>
+              </a:ext>
+            </a:extLst>
+          </p:cNvPr>
+          <p:cNvSpPr>
+            <a:spLocks noGrp="1"/>
+          </p:cNvSpPr>
+          <p:nvPr>
+            <p:ph type="title"/>
+          </p:nvPr>
+        </p:nvSpPr>
+        <p:spPr/>
+        <p:txBody>
+          <a:bodyPr/>
+          <a:lstStyle/>
+          <a:p>
+            <a:endParaRPr lang="en-US"/>
+          </a:p>
+        </p:txBody>
+      </p:sp>
+      <p:pic>
+        <p:nvPicPr>
+          <p:cNvPr id="7" name="Content Placeholder 6">
+            <a:extLst>
+              <a:ext uri="{FF2B5EF4-FFF2-40B4-BE49-F238E27FC236}">
+                <a16:creationId xmlns:a16="http://schemas.microsoft.com/office/drawing/2014/main" id="{0AE1D51C-3030-3397-7F7D-FA959E4F59A0}"/>
+              </a:ext>
+            </a:extLst>
+          </p:cNvPr>
+          <p:cNvPicPr>
+            <a:picLocks noGrp="1" noChangeAspect="1"/>
+          </p:cNvPicPr>
+          <p:nvPr>
+            <p:ph idx="1"/>
+          </p:nvPr>
+        </p:nvPicPr>
+        <p:blipFill>
+          <a:blip r:embed="rId2"/>
+          <a:stretch>
+            <a:fillRect/>
+          </a:stretch>
+        </p:blipFill>
+        <p:spPr>
+          <a:xfrm>
+            <a:off x="1317777" y="1412875"/>
+            <a:ext cx="9454845" cy="4595813"/>
+          </a:xfrm>
+        </p:spPr>
+      </p:pic>
+      <p:sp>
+        <p:nvSpPr>
+          <p:cNvPr id="4" name="Footer Placeholder 3">
+            <a:extLst>
+              <a:ext uri="{FF2B5EF4-FFF2-40B4-BE49-F238E27FC236}">
+                <a16:creationId xmlns:a16="http://schemas.microsoft.com/office/drawing/2014/main" id="{8F8BE8E2-2748-DBD2-81E8-B29EEF3A5C8F}"/>
+              </a:ext>
+            </a:extLst>
+          </p:cNvPr>
+          <p:cNvSpPr>
+            <a:spLocks noGrp="1"/>
+          </p:cNvSpPr>
+          <p:nvPr>
+            <p:ph type="ftr" sz="quarter" idx="11"/>
+          </p:nvPr>
+        </p:nvSpPr>
+        <p:spPr/>
+        <p:txBody>
+          <a:bodyPr/>
+          <a:lstStyle/>
+          <a:p>
+            <a:r>
+              <a:rPr lang="en-US"/>
+              <a:t>Progress Update</a:t>
+            </a:r>
+            <a:endParaRPr lang="en-US" dirty="0"/>
+          </a:p>
+        </p:txBody>
+      </p:sp>
+      <p:sp>
+        <p:nvSpPr>
+          <p:cNvPr id="5" name="Slide Number Placeholder 4">
+            <a:extLst>
+              <a:ext uri="{FF2B5EF4-FFF2-40B4-BE49-F238E27FC236}">
+                <a16:creationId xmlns:a16="http://schemas.microsoft.com/office/drawing/2014/main" id="{6B3508BB-9509-4D6C-9AB5-89C6ADA8D86E}"/>
+              </a:ext>
+            </a:extLst>
+          </p:cNvPr>
+          <p:cNvSpPr>
+            <a:spLocks noGrp="1"/>
+          </p:cNvSpPr>
+          <p:nvPr>
+            <p:ph type="sldNum" sz="quarter" idx="12"/>
+          </p:nvPr>
+        </p:nvSpPr>
+        <p:spPr/>
+        <p:txBody>
+          <a:bodyPr/>
+          <a:lstStyle/>
+          <a:p>
+            <a:r>
+              <a:rPr lang="en-US"/>
+              <a:t>PAGE  </a:t>
+            </a:r>
+            <a:fld id="{93005692-73BE-493E-93AB-ECD6027A7652}" type="slidenum">
+              <a:rPr lang="en-US" smtClean="0"/>
+              <a:pPr/>
+              <a:t>27</a:t>
+            </a:fld>
+            <a:endParaRPr lang="en-US" dirty="0"/>
+          </a:p>
+        </p:txBody>
+      </p:sp>
+    </p:spTree>
+    <p:extLst>
+      <p:ext uri="{BB962C8B-B14F-4D97-AF65-F5344CB8AC3E}">
+        <p14:creationId xmlns:p14="http://schemas.microsoft.com/office/powerpoint/2010/main" val="1232066859"/>
+      </p:ext>
+    </p:extLst>
+  </p:cSld>
+  <p:clrMapOvr>
+    <a:masterClrMapping/>
+  </p:clrMapOvr>
+  <p:transition spd="slow">
+    <p:push dir="u"/>
+  </p:transition>
+</p:sld>
+</file>
+
+<file path=ppt/slides/slide28.xml><?xml version="1.0" encoding="utf-8"?>
+<p:sld xmlns:a="http://schemas.openxmlformats.org/drawingml/2006/main" xmlns:r="http://schemas.openxmlformats.org/officeDocument/2006/relationships" xmlns:p="http://schemas.openxmlformats.org/presentationml/2006/main">
+  <p:cSld>
+    <p:spTree>
+      <p:nvGrpSpPr>
+        <p:cNvPr id="1" name=""/>
+        <p:cNvGrpSpPr/>
+        <p:nvPr/>
+      </p:nvGrpSpPr>
+      <p:grpSpPr>
+        <a:xfrm>
+          <a:off x="0" y="0"/>
+          <a:ext cx="0" cy="0"/>
+          <a:chOff x="0" y="0"/>
+          <a:chExt cx="0" cy="0"/>
+        </a:xfrm>
+      </p:grpSpPr>
+      <p:sp>
+        <p:nvSpPr>
+          <p:cNvPr id="2" name="Title 1">
+            <a:extLst>
+              <a:ext uri="{FF2B5EF4-FFF2-40B4-BE49-F238E27FC236}">
+                <a16:creationId xmlns:a16="http://schemas.microsoft.com/office/drawing/2014/main" id="{B9E1BEEA-C8A7-508E-45F8-3A76885CA19E}"/>
+              </a:ext>
+            </a:extLst>
+          </p:cNvPr>
+          <p:cNvSpPr>
+            <a:spLocks noGrp="1"/>
+          </p:cNvSpPr>
+          <p:nvPr>
+            <p:ph type="title"/>
+          </p:nvPr>
+        </p:nvSpPr>
+        <p:spPr/>
+        <p:txBody>
+          <a:bodyPr/>
+          <a:lstStyle/>
+          <a:p>
+            <a:endParaRPr lang="en-US"/>
+          </a:p>
+        </p:txBody>
+      </p:sp>
+      <p:pic>
+        <p:nvPicPr>
+          <p:cNvPr id="7" name="Content Placeholder 6">
+            <a:extLst>
+              <a:ext uri="{FF2B5EF4-FFF2-40B4-BE49-F238E27FC236}">
+                <a16:creationId xmlns:a16="http://schemas.microsoft.com/office/drawing/2014/main" id="{0DEB11A2-B2D5-54AC-E87D-5BC64F1A8CCC}"/>
+              </a:ext>
+            </a:extLst>
+          </p:cNvPr>
+          <p:cNvPicPr>
+            <a:picLocks noGrp="1" noChangeAspect="1"/>
+          </p:cNvPicPr>
+          <p:nvPr>
+            <p:ph idx="1"/>
+          </p:nvPr>
+        </p:nvPicPr>
+        <p:blipFill>
+          <a:blip r:embed="rId2"/>
+          <a:stretch>
+            <a:fillRect/>
+          </a:stretch>
+        </p:blipFill>
+        <p:spPr>
+          <a:xfrm>
+            <a:off x="1377991" y="1412875"/>
+            <a:ext cx="9334418" cy="4595813"/>
+          </a:xfrm>
+          <a:prstGeom prst="rect">
+            <a:avLst/>
+          </a:prstGeom>
+        </p:spPr>
+      </p:pic>
+      <p:sp>
+        <p:nvSpPr>
+          <p:cNvPr id="4" name="Footer Placeholder 3">
+            <a:extLst>
+              <a:ext uri="{FF2B5EF4-FFF2-40B4-BE49-F238E27FC236}">
+                <a16:creationId xmlns:a16="http://schemas.microsoft.com/office/drawing/2014/main" id="{DCCE5397-BA5B-4B11-EAD5-235EF69D5BE0}"/>
+              </a:ext>
+            </a:extLst>
+          </p:cNvPr>
+          <p:cNvSpPr>
+            <a:spLocks noGrp="1"/>
+          </p:cNvSpPr>
+          <p:nvPr>
+            <p:ph type="ftr" sz="quarter" idx="11"/>
+          </p:nvPr>
+        </p:nvSpPr>
+        <p:spPr/>
+        <p:txBody>
+          <a:bodyPr/>
+          <a:lstStyle/>
+          <a:p>
+            <a:r>
+              <a:rPr lang="en-US"/>
+              <a:t>Progress Update</a:t>
+            </a:r>
+            <a:endParaRPr lang="en-US" dirty="0"/>
+          </a:p>
+        </p:txBody>
+      </p:sp>
+      <p:sp>
+        <p:nvSpPr>
+          <p:cNvPr id="5" name="Slide Number Placeholder 4">
+            <a:extLst>
+              <a:ext uri="{FF2B5EF4-FFF2-40B4-BE49-F238E27FC236}">
+                <a16:creationId xmlns:a16="http://schemas.microsoft.com/office/drawing/2014/main" id="{AEDCC0AC-0A3B-3E18-1D87-A4570AD38DB5}"/>
+              </a:ext>
+            </a:extLst>
+          </p:cNvPr>
+          <p:cNvSpPr>
+            <a:spLocks noGrp="1"/>
+          </p:cNvSpPr>
+          <p:nvPr>
+            <p:ph type="sldNum" sz="quarter" idx="12"/>
+          </p:nvPr>
+        </p:nvSpPr>
+        <p:spPr/>
+        <p:txBody>
+          <a:bodyPr/>
+          <a:lstStyle/>
+          <a:p>
+            <a:r>
+              <a:rPr lang="en-US"/>
+              <a:t>PAGE  </a:t>
+            </a:r>
+            <a:fld id="{93005692-73BE-493E-93AB-ECD6027A7652}" type="slidenum">
+              <a:rPr lang="en-US" smtClean="0"/>
+              <a:pPr/>
+              <a:t>28</a:t>
+            </a:fld>
+            <a:endParaRPr lang="en-US" dirty="0"/>
+          </a:p>
+        </p:txBody>
+      </p:sp>
+    </p:spTree>
+    <p:extLst>
+      <p:ext uri="{BB962C8B-B14F-4D97-AF65-F5344CB8AC3E}">
+        <p14:creationId xmlns:p14="http://schemas.microsoft.com/office/powerpoint/2010/main" val="311864549"/>
+      </p:ext>
+    </p:extLst>
+  </p:cSld>
+  <p:clrMapOvr>
+    <a:masterClrMapping/>
+  </p:clrMapOvr>
+  <p:transition spd="slow">
+    <p:push dir="u"/>
+  </p:transition>
+</p:sld>
+</file>
+
+<file path=ppt/slides/slide29.xml><?xml version="1.0" encoding="utf-8"?>
+<p:sld xmlns:a="http://schemas.openxmlformats.org/drawingml/2006/main" xmlns:r="http://schemas.openxmlformats.org/officeDocument/2006/relationships" xmlns:p="http://schemas.openxmlformats.org/presentationml/2006/main">
+  <p:cSld>
+    <p:spTree>
+      <p:nvGrpSpPr>
+        <p:cNvPr id="1" name=""/>
+        <p:cNvGrpSpPr/>
+        <p:nvPr/>
+      </p:nvGrpSpPr>
+      <p:grpSpPr>
+        <a:xfrm>
+          <a:off x="0" y="0"/>
+          <a:ext cx="0" cy="0"/>
+          <a:chOff x="0" y="0"/>
+          <a:chExt cx="0" cy="0"/>
+        </a:xfrm>
+      </p:grpSpPr>
+      <p:sp>
+        <p:nvSpPr>
+          <p:cNvPr id="2" name="Title 1">
+            <a:extLst>
+              <a:ext uri="{FF2B5EF4-FFF2-40B4-BE49-F238E27FC236}">
+                <a16:creationId xmlns:a16="http://schemas.microsoft.com/office/drawing/2014/main" id="{D952DB96-89A3-FFE3-2B20-CBCF80DBBD93}"/>
+              </a:ext>
+            </a:extLst>
+          </p:cNvPr>
+          <p:cNvSpPr>
+            <a:spLocks noGrp="1"/>
+          </p:cNvSpPr>
+          <p:nvPr>
+            <p:ph type="title"/>
+          </p:nvPr>
+        </p:nvSpPr>
+        <p:spPr/>
+        <p:txBody>
+          <a:bodyPr/>
+          <a:lstStyle/>
+          <a:p>
+            <a:endParaRPr lang="en-US"/>
+          </a:p>
+        </p:txBody>
+      </p:sp>
+      <p:pic>
+        <p:nvPicPr>
+          <p:cNvPr id="7" name="Content Placeholder 6">
+            <a:extLst>
+              <a:ext uri="{FF2B5EF4-FFF2-40B4-BE49-F238E27FC236}">
+                <a16:creationId xmlns:a16="http://schemas.microsoft.com/office/drawing/2014/main" id="{ACBC7D54-6A3F-122B-C97F-8AE1B368CF37}"/>
+              </a:ext>
+            </a:extLst>
+          </p:cNvPr>
+          <p:cNvPicPr>
+            <a:picLocks noGrp="1" noChangeAspect="1"/>
+          </p:cNvPicPr>
+          <p:nvPr>
+            <p:ph idx="1"/>
+          </p:nvPr>
+        </p:nvPicPr>
+        <p:blipFill>
+          <a:blip r:embed="rId2"/>
+          <a:stretch>
+            <a:fillRect/>
+          </a:stretch>
+        </p:blipFill>
+        <p:spPr>
+          <a:xfrm>
+            <a:off x="260350" y="2415950"/>
+            <a:ext cx="11569700" cy="2589663"/>
+          </a:xfrm>
+        </p:spPr>
+      </p:pic>
+      <p:sp>
+        <p:nvSpPr>
+          <p:cNvPr id="4" name="Footer Placeholder 3">
+            <a:extLst>
+              <a:ext uri="{FF2B5EF4-FFF2-40B4-BE49-F238E27FC236}">
+                <a16:creationId xmlns:a16="http://schemas.microsoft.com/office/drawing/2014/main" id="{881FA4CD-D965-3D5A-511B-AD312E759BC8}"/>
+              </a:ext>
+            </a:extLst>
+          </p:cNvPr>
+          <p:cNvSpPr>
+            <a:spLocks noGrp="1"/>
+          </p:cNvSpPr>
+          <p:nvPr>
+            <p:ph type="ftr" sz="quarter" idx="11"/>
+          </p:nvPr>
+        </p:nvSpPr>
+        <p:spPr/>
+        <p:txBody>
+          <a:bodyPr/>
+          <a:lstStyle/>
+          <a:p>
+            <a:r>
+              <a:rPr lang="en-US"/>
+              <a:t>Progress Update</a:t>
+            </a:r>
+            <a:endParaRPr lang="en-US" dirty="0"/>
+          </a:p>
+        </p:txBody>
+      </p:sp>
+      <p:sp>
+        <p:nvSpPr>
+          <p:cNvPr id="5" name="Slide Number Placeholder 4">
+            <a:extLst>
+              <a:ext uri="{FF2B5EF4-FFF2-40B4-BE49-F238E27FC236}">
+                <a16:creationId xmlns:a16="http://schemas.microsoft.com/office/drawing/2014/main" id="{48A5D627-84E2-235B-95F7-04F094C8E6A5}"/>
+              </a:ext>
+            </a:extLst>
+          </p:cNvPr>
+          <p:cNvSpPr>
+            <a:spLocks noGrp="1"/>
+          </p:cNvSpPr>
+          <p:nvPr>
+            <p:ph type="sldNum" sz="quarter" idx="12"/>
+          </p:nvPr>
+        </p:nvSpPr>
+        <p:spPr/>
+        <p:txBody>
+          <a:bodyPr/>
+          <a:lstStyle/>
+          <a:p>
+            <a:r>
+              <a:rPr lang="en-US"/>
+              <a:t>PAGE  </a:t>
+            </a:r>
+            <a:fld id="{93005692-73BE-493E-93AB-ECD6027A7652}" type="slidenum">
+              <a:rPr lang="en-US" smtClean="0"/>
+              <a:pPr/>
+              <a:t>29</a:t>
+            </a:fld>
+            <a:endParaRPr lang="en-US" dirty="0"/>
+          </a:p>
+        </p:txBody>
+      </p:sp>
+    </p:spTree>
+    <p:extLst>
+      <p:ext uri="{BB962C8B-B14F-4D97-AF65-F5344CB8AC3E}">
+        <p14:creationId xmlns:p14="http://schemas.microsoft.com/office/powerpoint/2010/main" val="3492004562"/>
+      </p:ext>
+    </p:extLst>
+  </p:cSld>
+  <p:clrMapOvr>
+    <a:masterClrMapping/>
+  </p:clrMapOvr>
+  <p:transition spd="slow">
+    <p:push dir="u"/>
+  </p:transition>
+</p:sld>
+</file>
+
 <file path=ppt/slides/slide3.xml><?xml version="1.0" encoding="utf-8"?>
 <p:sld xmlns:a="http://schemas.openxmlformats.org/drawingml/2006/main" xmlns:r="http://schemas.openxmlformats.org/officeDocument/2006/relationships" xmlns:p="http://schemas.openxmlformats.org/presentationml/2006/main">
   <p:cSld>
@@ -12187,6 +14640,1542 @@
     <p:extLst>
       <p:ext uri="{BB962C8B-B14F-4D97-AF65-F5344CB8AC3E}">
         <p14:creationId xmlns:p14="http://schemas.microsoft.com/office/powerpoint/2010/main" val="126162087"/>
+      </p:ext>
+    </p:extLst>
+  </p:cSld>
+  <p:clrMapOvr>
+    <a:masterClrMapping/>
+  </p:clrMapOvr>
+  <p:transition spd="slow">
+    <p:push dir="u"/>
+  </p:transition>
+</p:sld>
+</file>
+
+<file path=ppt/slides/slide30.xml><?xml version="1.0" encoding="utf-8"?>
+<p:sld xmlns:a="http://schemas.openxmlformats.org/drawingml/2006/main" xmlns:r="http://schemas.openxmlformats.org/officeDocument/2006/relationships" xmlns:p="http://schemas.openxmlformats.org/presentationml/2006/main">
+  <p:cSld>
+    <p:spTree>
+      <p:nvGrpSpPr>
+        <p:cNvPr id="1" name=""/>
+        <p:cNvGrpSpPr/>
+        <p:nvPr/>
+      </p:nvGrpSpPr>
+      <p:grpSpPr>
+        <a:xfrm>
+          <a:off x="0" y="0"/>
+          <a:ext cx="0" cy="0"/>
+          <a:chOff x="0" y="0"/>
+          <a:chExt cx="0" cy="0"/>
+        </a:xfrm>
+      </p:grpSpPr>
+      <p:sp>
+        <p:nvSpPr>
+          <p:cNvPr id="2" name="Title 1">
+            <a:extLst>
+              <a:ext uri="{FF2B5EF4-FFF2-40B4-BE49-F238E27FC236}">
+                <a16:creationId xmlns:a16="http://schemas.microsoft.com/office/drawing/2014/main" id="{9ABECAC0-C2CC-90B3-DE38-726D3F03A48C}"/>
+              </a:ext>
+            </a:extLst>
+          </p:cNvPr>
+          <p:cNvSpPr>
+            <a:spLocks noGrp="1"/>
+          </p:cNvSpPr>
+          <p:nvPr>
+            <p:ph type="title"/>
+          </p:nvPr>
+        </p:nvSpPr>
+        <p:spPr/>
+        <p:txBody>
+          <a:bodyPr/>
+          <a:lstStyle/>
+          <a:p>
+            <a:endParaRPr lang="en-US"/>
+          </a:p>
+        </p:txBody>
+      </p:sp>
+      <p:sp>
+        <p:nvSpPr>
+          <p:cNvPr id="4" name="Footer Placeholder 3">
+            <a:extLst>
+              <a:ext uri="{FF2B5EF4-FFF2-40B4-BE49-F238E27FC236}">
+                <a16:creationId xmlns:a16="http://schemas.microsoft.com/office/drawing/2014/main" id="{4707329B-4E87-0474-D89E-ABD41F00A80A}"/>
+              </a:ext>
+            </a:extLst>
+          </p:cNvPr>
+          <p:cNvSpPr>
+            <a:spLocks noGrp="1"/>
+          </p:cNvSpPr>
+          <p:nvPr>
+            <p:ph type="ftr" sz="quarter" idx="11"/>
+          </p:nvPr>
+        </p:nvSpPr>
+        <p:spPr/>
+        <p:txBody>
+          <a:bodyPr/>
+          <a:lstStyle/>
+          <a:p>
+            <a:r>
+              <a:rPr lang="en-US"/>
+              <a:t>Progress Update</a:t>
+            </a:r>
+            <a:endParaRPr lang="en-US" dirty="0"/>
+          </a:p>
+        </p:txBody>
+      </p:sp>
+      <p:sp>
+        <p:nvSpPr>
+          <p:cNvPr id="5" name="Slide Number Placeholder 4">
+            <a:extLst>
+              <a:ext uri="{FF2B5EF4-FFF2-40B4-BE49-F238E27FC236}">
+                <a16:creationId xmlns:a16="http://schemas.microsoft.com/office/drawing/2014/main" id="{F75A4295-3027-959C-1945-CE97C0D7A0F3}"/>
+              </a:ext>
+            </a:extLst>
+          </p:cNvPr>
+          <p:cNvSpPr>
+            <a:spLocks noGrp="1"/>
+          </p:cNvSpPr>
+          <p:nvPr>
+            <p:ph type="sldNum" sz="quarter" idx="12"/>
+          </p:nvPr>
+        </p:nvSpPr>
+        <p:spPr/>
+        <p:txBody>
+          <a:bodyPr/>
+          <a:lstStyle/>
+          <a:p>
+            <a:r>
+              <a:rPr lang="en-US"/>
+              <a:t>PAGE  </a:t>
+            </a:r>
+            <a:fld id="{93005692-73BE-493E-93AB-ECD6027A7652}" type="slidenum">
+              <a:rPr lang="en-US" smtClean="0"/>
+              <a:pPr/>
+              <a:t>30</a:t>
+            </a:fld>
+            <a:endParaRPr lang="en-US" dirty="0"/>
+          </a:p>
+        </p:txBody>
+      </p:sp>
+      <p:pic>
+        <p:nvPicPr>
+          <p:cNvPr id="11" name="Content Placeholder 10">
+            <a:extLst>
+              <a:ext uri="{FF2B5EF4-FFF2-40B4-BE49-F238E27FC236}">
+                <a16:creationId xmlns:a16="http://schemas.microsoft.com/office/drawing/2014/main" id="{DA62148F-33BF-2CFB-0459-A60183055417}"/>
+              </a:ext>
+            </a:extLst>
+          </p:cNvPr>
+          <p:cNvPicPr>
+            <a:picLocks noGrp="1" noChangeAspect="1"/>
+          </p:cNvPicPr>
+          <p:nvPr>
+            <p:ph idx="1"/>
+          </p:nvPr>
+        </p:nvPicPr>
+        <p:blipFill>
+          <a:blip r:embed="rId2"/>
+          <a:stretch>
+            <a:fillRect/>
+          </a:stretch>
+        </p:blipFill>
+        <p:spPr>
+          <a:xfrm>
+            <a:off x="1948334" y="1412875"/>
+            <a:ext cx="8193731" cy="4595813"/>
+          </a:xfrm>
+          <a:prstGeom prst="rect">
+            <a:avLst/>
+          </a:prstGeom>
+        </p:spPr>
+      </p:pic>
+    </p:spTree>
+    <p:extLst>
+      <p:ext uri="{BB962C8B-B14F-4D97-AF65-F5344CB8AC3E}">
+        <p14:creationId xmlns:p14="http://schemas.microsoft.com/office/powerpoint/2010/main" val="3035409968"/>
+      </p:ext>
+    </p:extLst>
+  </p:cSld>
+  <p:clrMapOvr>
+    <a:masterClrMapping/>
+  </p:clrMapOvr>
+  <p:transition spd="slow">
+    <p:push dir="u"/>
+  </p:transition>
+</p:sld>
+</file>
+
+<file path=ppt/slides/slide31.xml><?xml version="1.0" encoding="utf-8"?>
+<p:sld xmlns:a="http://schemas.openxmlformats.org/drawingml/2006/main" xmlns:r="http://schemas.openxmlformats.org/officeDocument/2006/relationships" xmlns:p="http://schemas.openxmlformats.org/presentationml/2006/main">
+  <p:cSld>
+    <p:spTree>
+      <p:nvGrpSpPr>
+        <p:cNvPr id="1" name=""/>
+        <p:cNvGrpSpPr/>
+        <p:nvPr/>
+      </p:nvGrpSpPr>
+      <p:grpSpPr>
+        <a:xfrm>
+          <a:off x="0" y="0"/>
+          <a:ext cx="0" cy="0"/>
+          <a:chOff x="0" y="0"/>
+          <a:chExt cx="0" cy="0"/>
+        </a:xfrm>
+      </p:grpSpPr>
+      <p:sp>
+        <p:nvSpPr>
+          <p:cNvPr id="2" name="Title 1">
+            <a:extLst>
+              <a:ext uri="{FF2B5EF4-FFF2-40B4-BE49-F238E27FC236}">
+                <a16:creationId xmlns:a16="http://schemas.microsoft.com/office/drawing/2014/main" id="{50C0F864-E586-AB4E-8F82-975FC55F9D2C}"/>
+              </a:ext>
+            </a:extLst>
+          </p:cNvPr>
+          <p:cNvSpPr>
+            <a:spLocks noGrp="1"/>
+          </p:cNvSpPr>
+          <p:nvPr>
+            <p:ph type="title"/>
+          </p:nvPr>
+        </p:nvSpPr>
+        <p:spPr/>
+        <p:txBody>
+          <a:bodyPr/>
+          <a:lstStyle/>
+          <a:p>
+            <a:endParaRPr lang="en-US"/>
+          </a:p>
+        </p:txBody>
+      </p:sp>
+      <p:pic>
+        <p:nvPicPr>
+          <p:cNvPr id="7" name="Content Placeholder 6">
+            <a:extLst>
+              <a:ext uri="{FF2B5EF4-FFF2-40B4-BE49-F238E27FC236}">
+                <a16:creationId xmlns:a16="http://schemas.microsoft.com/office/drawing/2014/main" id="{1F674D79-306E-CEC2-85E5-FB8823E5BEB3}"/>
+              </a:ext>
+            </a:extLst>
+          </p:cNvPr>
+          <p:cNvPicPr>
+            <a:picLocks noGrp="1" noChangeAspect="1"/>
+          </p:cNvPicPr>
+          <p:nvPr>
+            <p:ph idx="1"/>
+          </p:nvPr>
+        </p:nvPicPr>
+        <p:blipFill>
+          <a:blip r:embed="rId2"/>
+          <a:stretch>
+            <a:fillRect/>
+          </a:stretch>
+        </p:blipFill>
+        <p:spPr>
+          <a:xfrm>
+            <a:off x="2374996" y="1412875"/>
+            <a:ext cx="7340407" cy="4595813"/>
+          </a:xfrm>
+          <a:prstGeom prst="rect">
+            <a:avLst/>
+          </a:prstGeom>
+        </p:spPr>
+      </p:pic>
+      <p:sp>
+        <p:nvSpPr>
+          <p:cNvPr id="4" name="Footer Placeholder 3">
+            <a:extLst>
+              <a:ext uri="{FF2B5EF4-FFF2-40B4-BE49-F238E27FC236}">
+                <a16:creationId xmlns:a16="http://schemas.microsoft.com/office/drawing/2014/main" id="{909BE86A-9394-402C-7D6C-2F58BD970B1F}"/>
+              </a:ext>
+            </a:extLst>
+          </p:cNvPr>
+          <p:cNvSpPr>
+            <a:spLocks noGrp="1"/>
+          </p:cNvSpPr>
+          <p:nvPr>
+            <p:ph type="ftr" sz="quarter" idx="11"/>
+          </p:nvPr>
+        </p:nvSpPr>
+        <p:spPr/>
+        <p:txBody>
+          <a:bodyPr/>
+          <a:lstStyle/>
+          <a:p>
+            <a:r>
+              <a:rPr lang="en-US"/>
+              <a:t>Progress Update</a:t>
+            </a:r>
+            <a:endParaRPr lang="en-US" dirty="0"/>
+          </a:p>
+        </p:txBody>
+      </p:sp>
+      <p:sp>
+        <p:nvSpPr>
+          <p:cNvPr id="5" name="Slide Number Placeholder 4">
+            <a:extLst>
+              <a:ext uri="{FF2B5EF4-FFF2-40B4-BE49-F238E27FC236}">
+                <a16:creationId xmlns:a16="http://schemas.microsoft.com/office/drawing/2014/main" id="{5B4585C5-FB0E-F347-7BAD-C60BA6AC7BAC}"/>
+              </a:ext>
+            </a:extLst>
+          </p:cNvPr>
+          <p:cNvSpPr>
+            <a:spLocks noGrp="1"/>
+          </p:cNvSpPr>
+          <p:nvPr>
+            <p:ph type="sldNum" sz="quarter" idx="12"/>
+          </p:nvPr>
+        </p:nvSpPr>
+        <p:spPr/>
+        <p:txBody>
+          <a:bodyPr/>
+          <a:lstStyle/>
+          <a:p>
+            <a:r>
+              <a:rPr lang="en-US"/>
+              <a:t>PAGE  </a:t>
+            </a:r>
+            <a:fld id="{93005692-73BE-493E-93AB-ECD6027A7652}" type="slidenum">
+              <a:rPr lang="en-US" smtClean="0"/>
+              <a:pPr/>
+              <a:t>31</a:t>
+            </a:fld>
+            <a:endParaRPr lang="en-US" dirty="0"/>
+          </a:p>
+        </p:txBody>
+      </p:sp>
+    </p:spTree>
+    <p:extLst>
+      <p:ext uri="{BB962C8B-B14F-4D97-AF65-F5344CB8AC3E}">
+        <p14:creationId xmlns:p14="http://schemas.microsoft.com/office/powerpoint/2010/main" val="2707371887"/>
+      </p:ext>
+    </p:extLst>
+  </p:cSld>
+  <p:clrMapOvr>
+    <a:masterClrMapping/>
+  </p:clrMapOvr>
+  <p:transition spd="slow">
+    <p:push dir="u"/>
+  </p:transition>
+</p:sld>
+</file>
+
+<file path=ppt/slides/slide32.xml><?xml version="1.0" encoding="utf-8"?>
+<p:sld xmlns:a="http://schemas.openxmlformats.org/drawingml/2006/main" xmlns:r="http://schemas.openxmlformats.org/officeDocument/2006/relationships" xmlns:p="http://schemas.openxmlformats.org/presentationml/2006/main">
+  <p:cSld>
+    <p:spTree>
+      <p:nvGrpSpPr>
+        <p:cNvPr id="1" name=""/>
+        <p:cNvGrpSpPr/>
+        <p:nvPr/>
+      </p:nvGrpSpPr>
+      <p:grpSpPr>
+        <a:xfrm>
+          <a:off x="0" y="0"/>
+          <a:ext cx="0" cy="0"/>
+          <a:chOff x="0" y="0"/>
+          <a:chExt cx="0" cy="0"/>
+        </a:xfrm>
+      </p:grpSpPr>
+      <p:sp>
+        <p:nvSpPr>
+          <p:cNvPr id="2" name="Title 1">
+            <a:extLst>
+              <a:ext uri="{FF2B5EF4-FFF2-40B4-BE49-F238E27FC236}">
+                <a16:creationId xmlns:a16="http://schemas.microsoft.com/office/drawing/2014/main" id="{8C25DF4F-8815-5F9D-354A-EADA825DBAC1}"/>
+              </a:ext>
+            </a:extLst>
+          </p:cNvPr>
+          <p:cNvSpPr>
+            <a:spLocks noGrp="1"/>
+          </p:cNvSpPr>
+          <p:nvPr>
+            <p:ph type="title"/>
+          </p:nvPr>
+        </p:nvSpPr>
+        <p:spPr/>
+        <p:txBody>
+          <a:bodyPr/>
+          <a:lstStyle/>
+          <a:p>
+            <a:r>
+              <a:rPr lang="en-US" dirty="0"/>
+              <a:t>Steepness=500000</a:t>
+            </a:r>
+          </a:p>
+        </p:txBody>
+      </p:sp>
+      <p:pic>
+        <p:nvPicPr>
+          <p:cNvPr id="7" name="Content Placeholder 6">
+            <a:extLst>
+              <a:ext uri="{FF2B5EF4-FFF2-40B4-BE49-F238E27FC236}">
+                <a16:creationId xmlns:a16="http://schemas.microsoft.com/office/drawing/2014/main" id="{6090C0F4-4C58-1CA2-2EA1-5B788CEB4F4C}"/>
+              </a:ext>
+            </a:extLst>
+          </p:cNvPr>
+          <p:cNvPicPr>
+            <a:picLocks noGrp="1" noChangeAspect="1"/>
+          </p:cNvPicPr>
+          <p:nvPr>
+            <p:ph idx="1"/>
+          </p:nvPr>
+        </p:nvPicPr>
+        <p:blipFill>
+          <a:blip r:embed="rId2"/>
+          <a:stretch>
+            <a:fillRect/>
+          </a:stretch>
+        </p:blipFill>
+        <p:spPr>
+          <a:xfrm>
+            <a:off x="2134884" y="1412875"/>
+            <a:ext cx="7820631" cy="4595813"/>
+          </a:xfrm>
+          <a:prstGeom prst="rect">
+            <a:avLst/>
+          </a:prstGeom>
+        </p:spPr>
+      </p:pic>
+      <p:sp>
+        <p:nvSpPr>
+          <p:cNvPr id="4" name="Footer Placeholder 3">
+            <a:extLst>
+              <a:ext uri="{FF2B5EF4-FFF2-40B4-BE49-F238E27FC236}">
+                <a16:creationId xmlns:a16="http://schemas.microsoft.com/office/drawing/2014/main" id="{181360BE-03E1-9EB0-5C46-9090A0443095}"/>
+              </a:ext>
+            </a:extLst>
+          </p:cNvPr>
+          <p:cNvSpPr>
+            <a:spLocks noGrp="1"/>
+          </p:cNvSpPr>
+          <p:nvPr>
+            <p:ph type="ftr" sz="quarter" idx="11"/>
+          </p:nvPr>
+        </p:nvSpPr>
+        <p:spPr/>
+        <p:txBody>
+          <a:bodyPr/>
+          <a:lstStyle/>
+          <a:p>
+            <a:r>
+              <a:rPr lang="en-US"/>
+              <a:t>Progress Update</a:t>
+            </a:r>
+            <a:endParaRPr lang="en-US" dirty="0"/>
+          </a:p>
+        </p:txBody>
+      </p:sp>
+      <p:sp>
+        <p:nvSpPr>
+          <p:cNvPr id="5" name="Slide Number Placeholder 4">
+            <a:extLst>
+              <a:ext uri="{FF2B5EF4-FFF2-40B4-BE49-F238E27FC236}">
+                <a16:creationId xmlns:a16="http://schemas.microsoft.com/office/drawing/2014/main" id="{D75B86AE-90AF-91A9-50D3-E956E46DCAF5}"/>
+              </a:ext>
+            </a:extLst>
+          </p:cNvPr>
+          <p:cNvSpPr>
+            <a:spLocks noGrp="1"/>
+          </p:cNvSpPr>
+          <p:nvPr>
+            <p:ph type="sldNum" sz="quarter" idx="12"/>
+          </p:nvPr>
+        </p:nvSpPr>
+        <p:spPr/>
+        <p:txBody>
+          <a:bodyPr/>
+          <a:lstStyle/>
+          <a:p>
+            <a:r>
+              <a:rPr lang="en-US"/>
+              <a:t>PAGE  </a:t>
+            </a:r>
+            <a:fld id="{93005692-73BE-493E-93AB-ECD6027A7652}" type="slidenum">
+              <a:rPr lang="en-US" smtClean="0"/>
+              <a:pPr/>
+              <a:t>32</a:t>
+            </a:fld>
+            <a:endParaRPr lang="en-US" dirty="0"/>
+          </a:p>
+        </p:txBody>
+      </p:sp>
+    </p:spTree>
+    <p:extLst>
+      <p:ext uri="{BB962C8B-B14F-4D97-AF65-F5344CB8AC3E}">
+        <p14:creationId xmlns:p14="http://schemas.microsoft.com/office/powerpoint/2010/main" val="3747080379"/>
+      </p:ext>
+    </p:extLst>
+  </p:cSld>
+  <p:clrMapOvr>
+    <a:masterClrMapping/>
+  </p:clrMapOvr>
+  <p:transition spd="slow">
+    <p:push dir="u"/>
+  </p:transition>
+</p:sld>
+</file>
+
+<file path=ppt/slides/slide33.xml><?xml version="1.0" encoding="utf-8"?>
+<p:sld xmlns:a="http://schemas.openxmlformats.org/drawingml/2006/main" xmlns:r="http://schemas.openxmlformats.org/officeDocument/2006/relationships" xmlns:p="http://schemas.openxmlformats.org/presentationml/2006/main">
+  <p:cSld>
+    <p:spTree>
+      <p:nvGrpSpPr>
+        <p:cNvPr id="1" name=""/>
+        <p:cNvGrpSpPr/>
+        <p:nvPr/>
+      </p:nvGrpSpPr>
+      <p:grpSpPr>
+        <a:xfrm>
+          <a:off x="0" y="0"/>
+          <a:ext cx="0" cy="0"/>
+          <a:chOff x="0" y="0"/>
+          <a:chExt cx="0" cy="0"/>
+        </a:xfrm>
+      </p:grpSpPr>
+      <p:sp>
+        <p:nvSpPr>
+          <p:cNvPr id="2" name="Title 1">
+            <a:extLst>
+              <a:ext uri="{FF2B5EF4-FFF2-40B4-BE49-F238E27FC236}">
+                <a16:creationId xmlns:a16="http://schemas.microsoft.com/office/drawing/2014/main" id="{21C9B1C6-77D3-7029-983A-B60209E295FC}"/>
+              </a:ext>
+            </a:extLst>
+          </p:cNvPr>
+          <p:cNvSpPr>
+            <a:spLocks noGrp="1"/>
+          </p:cNvSpPr>
+          <p:nvPr>
+            <p:ph type="title"/>
+          </p:nvPr>
+        </p:nvSpPr>
+        <p:spPr/>
+        <p:txBody>
+          <a:bodyPr/>
+          <a:lstStyle/>
+          <a:p>
+            <a:r>
+              <a:rPr lang="en-US" dirty="0"/>
+              <a:t>Steepness=800000</a:t>
+            </a:r>
+          </a:p>
+        </p:txBody>
+      </p:sp>
+      <p:pic>
+        <p:nvPicPr>
+          <p:cNvPr id="7" name="Content Placeholder 6">
+            <a:extLst>
+              <a:ext uri="{FF2B5EF4-FFF2-40B4-BE49-F238E27FC236}">
+                <a16:creationId xmlns:a16="http://schemas.microsoft.com/office/drawing/2014/main" id="{37F22F55-CC7A-2105-C10D-90D0D29178A7}"/>
+              </a:ext>
+            </a:extLst>
+          </p:cNvPr>
+          <p:cNvPicPr>
+            <a:picLocks noGrp="1" noChangeAspect="1"/>
+          </p:cNvPicPr>
+          <p:nvPr>
+            <p:ph idx="1"/>
+          </p:nvPr>
+        </p:nvPicPr>
+        <p:blipFill>
+          <a:blip r:embed="rId2"/>
+          <a:stretch>
+            <a:fillRect/>
+          </a:stretch>
+        </p:blipFill>
+        <p:spPr>
+          <a:xfrm>
+            <a:off x="2033755" y="1412875"/>
+            <a:ext cx="8022889" cy="4595813"/>
+          </a:xfrm>
+          <a:prstGeom prst="rect">
+            <a:avLst/>
+          </a:prstGeom>
+        </p:spPr>
+      </p:pic>
+      <p:sp>
+        <p:nvSpPr>
+          <p:cNvPr id="4" name="Footer Placeholder 3">
+            <a:extLst>
+              <a:ext uri="{FF2B5EF4-FFF2-40B4-BE49-F238E27FC236}">
+                <a16:creationId xmlns:a16="http://schemas.microsoft.com/office/drawing/2014/main" id="{364F31E7-14E8-B47B-90B1-F94DF3D83207}"/>
+              </a:ext>
+            </a:extLst>
+          </p:cNvPr>
+          <p:cNvSpPr>
+            <a:spLocks noGrp="1"/>
+          </p:cNvSpPr>
+          <p:nvPr>
+            <p:ph type="ftr" sz="quarter" idx="11"/>
+          </p:nvPr>
+        </p:nvSpPr>
+        <p:spPr/>
+        <p:txBody>
+          <a:bodyPr/>
+          <a:lstStyle/>
+          <a:p>
+            <a:r>
+              <a:rPr lang="en-US"/>
+              <a:t>Progress Update</a:t>
+            </a:r>
+            <a:endParaRPr lang="en-US" dirty="0"/>
+          </a:p>
+        </p:txBody>
+      </p:sp>
+      <p:sp>
+        <p:nvSpPr>
+          <p:cNvPr id="5" name="Slide Number Placeholder 4">
+            <a:extLst>
+              <a:ext uri="{FF2B5EF4-FFF2-40B4-BE49-F238E27FC236}">
+                <a16:creationId xmlns:a16="http://schemas.microsoft.com/office/drawing/2014/main" id="{BAAD5950-1E40-DD12-0FCD-48321644992F}"/>
+              </a:ext>
+            </a:extLst>
+          </p:cNvPr>
+          <p:cNvSpPr>
+            <a:spLocks noGrp="1"/>
+          </p:cNvSpPr>
+          <p:nvPr>
+            <p:ph type="sldNum" sz="quarter" idx="12"/>
+          </p:nvPr>
+        </p:nvSpPr>
+        <p:spPr/>
+        <p:txBody>
+          <a:bodyPr/>
+          <a:lstStyle/>
+          <a:p>
+            <a:r>
+              <a:rPr lang="en-US"/>
+              <a:t>PAGE  </a:t>
+            </a:r>
+            <a:fld id="{93005692-73BE-493E-93AB-ECD6027A7652}" type="slidenum">
+              <a:rPr lang="en-US" smtClean="0"/>
+              <a:pPr/>
+              <a:t>33</a:t>
+            </a:fld>
+            <a:endParaRPr lang="en-US" dirty="0"/>
+          </a:p>
+        </p:txBody>
+      </p:sp>
+    </p:spTree>
+    <p:extLst>
+      <p:ext uri="{BB962C8B-B14F-4D97-AF65-F5344CB8AC3E}">
+        <p14:creationId xmlns:p14="http://schemas.microsoft.com/office/powerpoint/2010/main" val="1603648487"/>
+      </p:ext>
+    </p:extLst>
+  </p:cSld>
+  <p:clrMapOvr>
+    <a:masterClrMapping/>
+  </p:clrMapOvr>
+  <p:transition spd="slow">
+    <p:push dir="u"/>
+  </p:transition>
+</p:sld>
+</file>
+
+<file path=ppt/slides/slide34.xml><?xml version="1.0" encoding="utf-8"?>
+<p:sld xmlns:a="http://schemas.openxmlformats.org/drawingml/2006/main" xmlns:r="http://schemas.openxmlformats.org/officeDocument/2006/relationships" xmlns:p="http://schemas.openxmlformats.org/presentationml/2006/main">
+  <p:cSld>
+    <p:spTree>
+      <p:nvGrpSpPr>
+        <p:cNvPr id="1" name=""/>
+        <p:cNvGrpSpPr/>
+        <p:nvPr/>
+      </p:nvGrpSpPr>
+      <p:grpSpPr>
+        <a:xfrm>
+          <a:off x="0" y="0"/>
+          <a:ext cx="0" cy="0"/>
+          <a:chOff x="0" y="0"/>
+          <a:chExt cx="0" cy="0"/>
+        </a:xfrm>
+      </p:grpSpPr>
+      <p:sp>
+        <p:nvSpPr>
+          <p:cNvPr id="2" name="Title 1">
+            <a:extLst>
+              <a:ext uri="{FF2B5EF4-FFF2-40B4-BE49-F238E27FC236}">
+                <a16:creationId xmlns:a16="http://schemas.microsoft.com/office/drawing/2014/main" id="{BAD9CF16-1F67-BC4A-0AF9-FB96DB359875}"/>
+              </a:ext>
+            </a:extLst>
+          </p:cNvPr>
+          <p:cNvSpPr>
+            <a:spLocks noGrp="1"/>
+          </p:cNvSpPr>
+          <p:nvPr>
+            <p:ph type="title"/>
+          </p:nvPr>
+        </p:nvSpPr>
+        <p:spPr/>
+        <p:txBody>
+          <a:bodyPr/>
+          <a:lstStyle/>
+          <a:p>
+            <a:endParaRPr lang="en-US"/>
+          </a:p>
+        </p:txBody>
+      </p:sp>
+      <p:pic>
+        <p:nvPicPr>
+          <p:cNvPr id="7" name="Content Placeholder 6">
+            <a:extLst>
+              <a:ext uri="{FF2B5EF4-FFF2-40B4-BE49-F238E27FC236}">
+                <a16:creationId xmlns:a16="http://schemas.microsoft.com/office/drawing/2014/main" id="{0D22F433-16BE-731B-C5B4-4E4B63FC4A9E}"/>
+              </a:ext>
+            </a:extLst>
+          </p:cNvPr>
+          <p:cNvPicPr>
+            <a:picLocks noGrp="1" noChangeAspect="1"/>
+          </p:cNvPicPr>
+          <p:nvPr>
+            <p:ph idx="1"/>
+          </p:nvPr>
+        </p:nvPicPr>
+        <p:blipFill>
+          <a:blip r:embed="rId2"/>
+          <a:stretch>
+            <a:fillRect/>
+          </a:stretch>
+        </p:blipFill>
+        <p:spPr>
+          <a:xfrm>
+            <a:off x="3231697" y="1412875"/>
+            <a:ext cx="5627006" cy="4595813"/>
+          </a:xfrm>
+          <a:prstGeom prst="rect">
+            <a:avLst/>
+          </a:prstGeom>
+        </p:spPr>
+      </p:pic>
+      <p:sp>
+        <p:nvSpPr>
+          <p:cNvPr id="4" name="Footer Placeholder 3">
+            <a:extLst>
+              <a:ext uri="{FF2B5EF4-FFF2-40B4-BE49-F238E27FC236}">
+                <a16:creationId xmlns:a16="http://schemas.microsoft.com/office/drawing/2014/main" id="{0860661C-FEDB-CA68-C951-49118D5857B8}"/>
+              </a:ext>
+            </a:extLst>
+          </p:cNvPr>
+          <p:cNvSpPr>
+            <a:spLocks noGrp="1"/>
+          </p:cNvSpPr>
+          <p:nvPr>
+            <p:ph type="ftr" sz="quarter" idx="11"/>
+          </p:nvPr>
+        </p:nvSpPr>
+        <p:spPr/>
+        <p:txBody>
+          <a:bodyPr/>
+          <a:lstStyle/>
+          <a:p>
+            <a:r>
+              <a:rPr lang="en-US"/>
+              <a:t>Progress Update</a:t>
+            </a:r>
+            <a:endParaRPr lang="en-US" dirty="0"/>
+          </a:p>
+        </p:txBody>
+      </p:sp>
+      <p:sp>
+        <p:nvSpPr>
+          <p:cNvPr id="5" name="Slide Number Placeholder 4">
+            <a:extLst>
+              <a:ext uri="{FF2B5EF4-FFF2-40B4-BE49-F238E27FC236}">
+                <a16:creationId xmlns:a16="http://schemas.microsoft.com/office/drawing/2014/main" id="{A03E8F0E-31BF-A843-20D0-3353B841B121}"/>
+              </a:ext>
+            </a:extLst>
+          </p:cNvPr>
+          <p:cNvSpPr>
+            <a:spLocks noGrp="1"/>
+          </p:cNvSpPr>
+          <p:nvPr>
+            <p:ph type="sldNum" sz="quarter" idx="12"/>
+          </p:nvPr>
+        </p:nvSpPr>
+        <p:spPr/>
+        <p:txBody>
+          <a:bodyPr/>
+          <a:lstStyle/>
+          <a:p>
+            <a:r>
+              <a:rPr lang="en-US"/>
+              <a:t>PAGE  </a:t>
+            </a:r>
+            <a:fld id="{93005692-73BE-493E-93AB-ECD6027A7652}" type="slidenum">
+              <a:rPr lang="en-US" smtClean="0"/>
+              <a:pPr/>
+              <a:t>34</a:t>
+            </a:fld>
+            <a:endParaRPr lang="en-US" dirty="0"/>
+          </a:p>
+        </p:txBody>
+      </p:sp>
+    </p:spTree>
+    <p:extLst>
+      <p:ext uri="{BB962C8B-B14F-4D97-AF65-F5344CB8AC3E}">
+        <p14:creationId xmlns:p14="http://schemas.microsoft.com/office/powerpoint/2010/main" val="2540234146"/>
+      </p:ext>
+    </p:extLst>
+  </p:cSld>
+  <p:clrMapOvr>
+    <a:masterClrMapping/>
+  </p:clrMapOvr>
+  <p:transition spd="slow">
+    <p:push dir="u"/>
+  </p:transition>
+</p:sld>
+</file>
+
+<file path=ppt/slides/slide35.xml><?xml version="1.0" encoding="utf-8"?>
+<p:sld xmlns:a="http://schemas.openxmlformats.org/drawingml/2006/main" xmlns:r="http://schemas.openxmlformats.org/officeDocument/2006/relationships" xmlns:p="http://schemas.openxmlformats.org/presentationml/2006/main">
+  <p:cSld>
+    <p:spTree>
+      <p:nvGrpSpPr>
+        <p:cNvPr id="1" name=""/>
+        <p:cNvGrpSpPr/>
+        <p:nvPr/>
+      </p:nvGrpSpPr>
+      <p:grpSpPr>
+        <a:xfrm>
+          <a:off x="0" y="0"/>
+          <a:ext cx="0" cy="0"/>
+          <a:chOff x="0" y="0"/>
+          <a:chExt cx="0" cy="0"/>
+        </a:xfrm>
+      </p:grpSpPr>
+      <p:sp>
+        <p:nvSpPr>
+          <p:cNvPr id="2" name="Title 1">
+            <a:extLst>
+              <a:ext uri="{FF2B5EF4-FFF2-40B4-BE49-F238E27FC236}">
+                <a16:creationId xmlns:a16="http://schemas.microsoft.com/office/drawing/2014/main" id="{3798A0B4-461C-BFA6-BC39-ACD98A99F762}"/>
+              </a:ext>
+            </a:extLst>
+          </p:cNvPr>
+          <p:cNvSpPr>
+            <a:spLocks noGrp="1"/>
+          </p:cNvSpPr>
+          <p:nvPr>
+            <p:ph type="title"/>
+          </p:nvPr>
+        </p:nvSpPr>
+        <p:spPr/>
+        <p:txBody>
+          <a:bodyPr/>
+          <a:lstStyle/>
+          <a:p>
+            <a:endParaRPr lang="en-US"/>
+          </a:p>
+        </p:txBody>
+      </p:sp>
+      <p:pic>
+        <p:nvPicPr>
+          <p:cNvPr id="7" name="Content Placeholder 6">
+            <a:extLst>
+              <a:ext uri="{FF2B5EF4-FFF2-40B4-BE49-F238E27FC236}">
+                <a16:creationId xmlns:a16="http://schemas.microsoft.com/office/drawing/2014/main" id="{16384353-0D9E-9685-5825-4761FDB998FD}"/>
+              </a:ext>
+            </a:extLst>
+          </p:cNvPr>
+          <p:cNvPicPr>
+            <a:picLocks noGrp="1" noChangeAspect="1"/>
+          </p:cNvPicPr>
+          <p:nvPr>
+            <p:ph idx="1"/>
+          </p:nvPr>
+        </p:nvPicPr>
+        <p:blipFill>
+          <a:blip r:embed="rId2"/>
+          <a:stretch>
+            <a:fillRect/>
+          </a:stretch>
+        </p:blipFill>
+        <p:spPr>
+          <a:xfrm>
+            <a:off x="3215880" y="1443515"/>
+            <a:ext cx="5658640" cy="4534533"/>
+          </a:xfrm>
+          <a:prstGeom prst="rect">
+            <a:avLst/>
+          </a:prstGeom>
+        </p:spPr>
+      </p:pic>
+      <p:sp>
+        <p:nvSpPr>
+          <p:cNvPr id="4" name="Footer Placeholder 3">
+            <a:extLst>
+              <a:ext uri="{FF2B5EF4-FFF2-40B4-BE49-F238E27FC236}">
+                <a16:creationId xmlns:a16="http://schemas.microsoft.com/office/drawing/2014/main" id="{FA9B3620-81C8-2056-A22F-CA8D1070AE32}"/>
+              </a:ext>
+            </a:extLst>
+          </p:cNvPr>
+          <p:cNvSpPr>
+            <a:spLocks noGrp="1"/>
+          </p:cNvSpPr>
+          <p:nvPr>
+            <p:ph type="ftr" sz="quarter" idx="11"/>
+          </p:nvPr>
+        </p:nvSpPr>
+        <p:spPr/>
+        <p:txBody>
+          <a:bodyPr/>
+          <a:lstStyle/>
+          <a:p>
+            <a:r>
+              <a:rPr lang="en-US"/>
+              <a:t>Progress Update</a:t>
+            </a:r>
+            <a:endParaRPr lang="en-US" dirty="0"/>
+          </a:p>
+        </p:txBody>
+      </p:sp>
+      <p:sp>
+        <p:nvSpPr>
+          <p:cNvPr id="5" name="Slide Number Placeholder 4">
+            <a:extLst>
+              <a:ext uri="{FF2B5EF4-FFF2-40B4-BE49-F238E27FC236}">
+                <a16:creationId xmlns:a16="http://schemas.microsoft.com/office/drawing/2014/main" id="{4F247324-CAFB-D910-BE45-E5DF06B59445}"/>
+              </a:ext>
+            </a:extLst>
+          </p:cNvPr>
+          <p:cNvSpPr>
+            <a:spLocks noGrp="1"/>
+          </p:cNvSpPr>
+          <p:nvPr>
+            <p:ph type="sldNum" sz="quarter" idx="12"/>
+          </p:nvPr>
+        </p:nvSpPr>
+        <p:spPr/>
+        <p:txBody>
+          <a:bodyPr/>
+          <a:lstStyle/>
+          <a:p>
+            <a:r>
+              <a:rPr lang="en-US"/>
+              <a:t>PAGE  </a:t>
+            </a:r>
+            <a:fld id="{93005692-73BE-493E-93AB-ECD6027A7652}" type="slidenum">
+              <a:rPr lang="en-US" smtClean="0"/>
+              <a:pPr/>
+              <a:t>35</a:t>
+            </a:fld>
+            <a:endParaRPr lang="en-US" dirty="0"/>
+          </a:p>
+        </p:txBody>
+      </p:sp>
+    </p:spTree>
+    <p:extLst>
+      <p:ext uri="{BB962C8B-B14F-4D97-AF65-F5344CB8AC3E}">
+        <p14:creationId xmlns:p14="http://schemas.microsoft.com/office/powerpoint/2010/main" val="927153255"/>
+      </p:ext>
+    </p:extLst>
+  </p:cSld>
+  <p:clrMapOvr>
+    <a:masterClrMapping/>
+  </p:clrMapOvr>
+  <p:transition spd="slow">
+    <p:push dir="u"/>
+  </p:transition>
+</p:sld>
+</file>
+
+<file path=ppt/slides/slide36.xml><?xml version="1.0" encoding="utf-8"?>
+<p:sld xmlns:a="http://schemas.openxmlformats.org/drawingml/2006/main" xmlns:r="http://schemas.openxmlformats.org/officeDocument/2006/relationships" xmlns:p="http://schemas.openxmlformats.org/presentationml/2006/main">
+  <p:cSld>
+    <p:spTree>
+      <p:nvGrpSpPr>
+        <p:cNvPr id="1" name=""/>
+        <p:cNvGrpSpPr/>
+        <p:nvPr/>
+      </p:nvGrpSpPr>
+      <p:grpSpPr>
+        <a:xfrm>
+          <a:off x="0" y="0"/>
+          <a:ext cx="0" cy="0"/>
+          <a:chOff x="0" y="0"/>
+          <a:chExt cx="0" cy="0"/>
+        </a:xfrm>
+      </p:grpSpPr>
+      <p:sp>
+        <p:nvSpPr>
+          <p:cNvPr id="2" name="Title 1">
+            <a:extLst>
+              <a:ext uri="{FF2B5EF4-FFF2-40B4-BE49-F238E27FC236}">
+                <a16:creationId xmlns:a16="http://schemas.microsoft.com/office/drawing/2014/main" id="{B62E5E29-11C0-A294-F207-AF69B13575EA}"/>
+              </a:ext>
+            </a:extLst>
+          </p:cNvPr>
+          <p:cNvSpPr>
+            <a:spLocks noGrp="1"/>
+          </p:cNvSpPr>
+          <p:nvPr>
+            <p:ph type="title"/>
+          </p:nvPr>
+        </p:nvSpPr>
+        <p:spPr/>
+        <p:txBody>
+          <a:bodyPr/>
+          <a:lstStyle/>
+          <a:p>
+            <a:endParaRPr lang="en-US"/>
+          </a:p>
+        </p:txBody>
+      </p:sp>
+      <p:pic>
+        <p:nvPicPr>
+          <p:cNvPr id="7" name="Content Placeholder 6">
+            <a:extLst>
+              <a:ext uri="{FF2B5EF4-FFF2-40B4-BE49-F238E27FC236}">
+                <a16:creationId xmlns:a16="http://schemas.microsoft.com/office/drawing/2014/main" id="{65A11DC9-57F0-05C9-7C79-F18F2EF8EE03}"/>
+              </a:ext>
+            </a:extLst>
+          </p:cNvPr>
+          <p:cNvPicPr>
+            <a:picLocks noGrp="1" noChangeAspect="1"/>
+          </p:cNvPicPr>
+          <p:nvPr>
+            <p:ph idx="1"/>
+          </p:nvPr>
+        </p:nvPicPr>
+        <p:blipFill>
+          <a:blip r:embed="rId2"/>
+          <a:stretch>
+            <a:fillRect/>
+          </a:stretch>
+        </p:blipFill>
+        <p:spPr>
+          <a:xfrm>
+            <a:off x="1868635" y="1412875"/>
+            <a:ext cx="8353129" cy="4595813"/>
+          </a:xfrm>
+          <a:prstGeom prst="rect">
+            <a:avLst/>
+          </a:prstGeom>
+        </p:spPr>
+      </p:pic>
+      <p:sp>
+        <p:nvSpPr>
+          <p:cNvPr id="4" name="Footer Placeholder 3">
+            <a:extLst>
+              <a:ext uri="{FF2B5EF4-FFF2-40B4-BE49-F238E27FC236}">
+                <a16:creationId xmlns:a16="http://schemas.microsoft.com/office/drawing/2014/main" id="{2E5B62BD-09F3-3990-EDB0-40C3D502D378}"/>
+              </a:ext>
+            </a:extLst>
+          </p:cNvPr>
+          <p:cNvSpPr>
+            <a:spLocks noGrp="1"/>
+          </p:cNvSpPr>
+          <p:nvPr>
+            <p:ph type="ftr" sz="quarter" idx="11"/>
+          </p:nvPr>
+        </p:nvSpPr>
+        <p:spPr/>
+        <p:txBody>
+          <a:bodyPr/>
+          <a:lstStyle/>
+          <a:p>
+            <a:r>
+              <a:rPr lang="en-US"/>
+              <a:t>Progress Update</a:t>
+            </a:r>
+            <a:endParaRPr lang="en-US" dirty="0"/>
+          </a:p>
+        </p:txBody>
+      </p:sp>
+      <p:sp>
+        <p:nvSpPr>
+          <p:cNvPr id="5" name="Slide Number Placeholder 4">
+            <a:extLst>
+              <a:ext uri="{FF2B5EF4-FFF2-40B4-BE49-F238E27FC236}">
+                <a16:creationId xmlns:a16="http://schemas.microsoft.com/office/drawing/2014/main" id="{78EAF962-F186-8194-2A75-DF4E51050ABC}"/>
+              </a:ext>
+            </a:extLst>
+          </p:cNvPr>
+          <p:cNvSpPr>
+            <a:spLocks noGrp="1"/>
+          </p:cNvSpPr>
+          <p:nvPr>
+            <p:ph type="sldNum" sz="quarter" idx="12"/>
+          </p:nvPr>
+        </p:nvSpPr>
+        <p:spPr/>
+        <p:txBody>
+          <a:bodyPr/>
+          <a:lstStyle/>
+          <a:p>
+            <a:r>
+              <a:rPr lang="en-US"/>
+              <a:t>PAGE  </a:t>
+            </a:r>
+            <a:fld id="{93005692-73BE-493E-93AB-ECD6027A7652}" type="slidenum">
+              <a:rPr lang="en-US" smtClean="0"/>
+              <a:pPr/>
+              <a:t>36</a:t>
+            </a:fld>
+            <a:endParaRPr lang="en-US" dirty="0"/>
+          </a:p>
+        </p:txBody>
+      </p:sp>
+    </p:spTree>
+    <p:extLst>
+      <p:ext uri="{BB962C8B-B14F-4D97-AF65-F5344CB8AC3E}">
+        <p14:creationId xmlns:p14="http://schemas.microsoft.com/office/powerpoint/2010/main" val="195585784"/>
+      </p:ext>
+    </p:extLst>
+  </p:cSld>
+  <p:clrMapOvr>
+    <a:masterClrMapping/>
+  </p:clrMapOvr>
+  <p:transition spd="slow">
+    <p:push dir="u"/>
+  </p:transition>
+</p:sld>
+</file>
+
+<file path=ppt/slides/slide37.xml><?xml version="1.0" encoding="utf-8"?>
+<p:sld xmlns:a="http://schemas.openxmlformats.org/drawingml/2006/main" xmlns:r="http://schemas.openxmlformats.org/officeDocument/2006/relationships" xmlns:p="http://schemas.openxmlformats.org/presentationml/2006/main">
+  <p:cSld>
+    <p:spTree>
+      <p:nvGrpSpPr>
+        <p:cNvPr id="1" name=""/>
+        <p:cNvGrpSpPr/>
+        <p:nvPr/>
+      </p:nvGrpSpPr>
+      <p:grpSpPr>
+        <a:xfrm>
+          <a:off x="0" y="0"/>
+          <a:ext cx="0" cy="0"/>
+          <a:chOff x="0" y="0"/>
+          <a:chExt cx="0" cy="0"/>
+        </a:xfrm>
+      </p:grpSpPr>
+      <p:sp>
+        <p:nvSpPr>
+          <p:cNvPr id="2" name="Title 1">
+            <a:extLst>
+              <a:ext uri="{FF2B5EF4-FFF2-40B4-BE49-F238E27FC236}">
+                <a16:creationId xmlns:a16="http://schemas.microsoft.com/office/drawing/2014/main" id="{5B8CCEF3-3B6E-87CF-00AE-520F26A07BC7}"/>
+              </a:ext>
+            </a:extLst>
+          </p:cNvPr>
+          <p:cNvSpPr>
+            <a:spLocks noGrp="1"/>
+          </p:cNvSpPr>
+          <p:nvPr>
+            <p:ph type="title"/>
+          </p:nvPr>
+        </p:nvSpPr>
+        <p:spPr/>
+        <p:txBody>
+          <a:bodyPr/>
+          <a:lstStyle/>
+          <a:p>
+            <a:endParaRPr lang="en-US"/>
+          </a:p>
+        </p:txBody>
+      </p:sp>
+      <p:pic>
+        <p:nvPicPr>
+          <p:cNvPr id="7" name="Content Placeholder 6">
+            <a:extLst>
+              <a:ext uri="{FF2B5EF4-FFF2-40B4-BE49-F238E27FC236}">
+                <a16:creationId xmlns:a16="http://schemas.microsoft.com/office/drawing/2014/main" id="{44E73F8B-040F-1EEF-09C6-42CB0AC325BE}"/>
+              </a:ext>
+            </a:extLst>
+          </p:cNvPr>
+          <p:cNvPicPr>
+            <a:picLocks noGrp="1" noChangeAspect="1"/>
+          </p:cNvPicPr>
+          <p:nvPr>
+            <p:ph idx="1"/>
+          </p:nvPr>
+        </p:nvPicPr>
+        <p:blipFill>
+          <a:blip r:embed="rId2"/>
+          <a:stretch>
+            <a:fillRect/>
+          </a:stretch>
+        </p:blipFill>
+        <p:spPr>
+          <a:xfrm>
+            <a:off x="4682935" y="2048437"/>
+            <a:ext cx="2724530" cy="3324689"/>
+          </a:xfrm>
+          <a:prstGeom prst="rect">
+            <a:avLst/>
+          </a:prstGeom>
+        </p:spPr>
+      </p:pic>
+      <p:sp>
+        <p:nvSpPr>
+          <p:cNvPr id="4" name="Footer Placeholder 3">
+            <a:extLst>
+              <a:ext uri="{FF2B5EF4-FFF2-40B4-BE49-F238E27FC236}">
+                <a16:creationId xmlns:a16="http://schemas.microsoft.com/office/drawing/2014/main" id="{7720E236-B0C0-484E-6296-15734D1E3116}"/>
+              </a:ext>
+            </a:extLst>
+          </p:cNvPr>
+          <p:cNvSpPr>
+            <a:spLocks noGrp="1"/>
+          </p:cNvSpPr>
+          <p:nvPr>
+            <p:ph type="ftr" sz="quarter" idx="11"/>
+          </p:nvPr>
+        </p:nvSpPr>
+        <p:spPr/>
+        <p:txBody>
+          <a:bodyPr/>
+          <a:lstStyle/>
+          <a:p>
+            <a:r>
+              <a:rPr lang="en-US"/>
+              <a:t>Progress Update</a:t>
+            </a:r>
+            <a:endParaRPr lang="en-US" dirty="0"/>
+          </a:p>
+        </p:txBody>
+      </p:sp>
+      <p:sp>
+        <p:nvSpPr>
+          <p:cNvPr id="5" name="Slide Number Placeholder 4">
+            <a:extLst>
+              <a:ext uri="{FF2B5EF4-FFF2-40B4-BE49-F238E27FC236}">
+                <a16:creationId xmlns:a16="http://schemas.microsoft.com/office/drawing/2014/main" id="{E3206442-16E6-C1AD-2E85-970BD3C93CFF}"/>
+              </a:ext>
+            </a:extLst>
+          </p:cNvPr>
+          <p:cNvSpPr>
+            <a:spLocks noGrp="1"/>
+          </p:cNvSpPr>
+          <p:nvPr>
+            <p:ph type="sldNum" sz="quarter" idx="12"/>
+          </p:nvPr>
+        </p:nvSpPr>
+        <p:spPr/>
+        <p:txBody>
+          <a:bodyPr/>
+          <a:lstStyle/>
+          <a:p>
+            <a:r>
+              <a:rPr lang="en-US"/>
+              <a:t>PAGE  </a:t>
+            </a:r>
+            <a:fld id="{93005692-73BE-493E-93AB-ECD6027A7652}" type="slidenum">
+              <a:rPr lang="en-US" smtClean="0"/>
+              <a:pPr/>
+              <a:t>37</a:t>
+            </a:fld>
+            <a:endParaRPr lang="en-US" dirty="0"/>
+          </a:p>
+        </p:txBody>
+      </p:sp>
+    </p:spTree>
+    <p:extLst>
+      <p:ext uri="{BB962C8B-B14F-4D97-AF65-F5344CB8AC3E}">
+        <p14:creationId xmlns:p14="http://schemas.microsoft.com/office/powerpoint/2010/main" val="1939427257"/>
+      </p:ext>
+    </p:extLst>
+  </p:cSld>
+  <p:clrMapOvr>
+    <a:masterClrMapping/>
+  </p:clrMapOvr>
+  <p:transition spd="slow">
+    <p:push dir="u"/>
+  </p:transition>
+</p:sld>
+</file>
+
+<file path=ppt/slides/slide38.xml><?xml version="1.0" encoding="utf-8"?>
+<p:sld xmlns:a="http://schemas.openxmlformats.org/drawingml/2006/main" xmlns:r="http://schemas.openxmlformats.org/officeDocument/2006/relationships" xmlns:p="http://schemas.openxmlformats.org/presentationml/2006/main">
+  <p:cSld>
+    <p:spTree>
+      <p:nvGrpSpPr>
+        <p:cNvPr id="1" name=""/>
+        <p:cNvGrpSpPr/>
+        <p:nvPr/>
+      </p:nvGrpSpPr>
+      <p:grpSpPr>
+        <a:xfrm>
+          <a:off x="0" y="0"/>
+          <a:ext cx="0" cy="0"/>
+          <a:chOff x="0" y="0"/>
+          <a:chExt cx="0" cy="0"/>
+        </a:xfrm>
+      </p:grpSpPr>
+      <p:sp>
+        <p:nvSpPr>
+          <p:cNvPr id="2" name="Title 1">
+            <a:extLst>
+              <a:ext uri="{FF2B5EF4-FFF2-40B4-BE49-F238E27FC236}">
+                <a16:creationId xmlns:a16="http://schemas.microsoft.com/office/drawing/2014/main" id="{32981DC2-DE5F-6518-B758-7073F16A1E46}"/>
+              </a:ext>
+            </a:extLst>
+          </p:cNvPr>
+          <p:cNvSpPr>
+            <a:spLocks noGrp="1"/>
+          </p:cNvSpPr>
+          <p:nvPr>
+            <p:ph type="title"/>
+          </p:nvPr>
+        </p:nvSpPr>
+        <p:spPr/>
+        <p:txBody>
+          <a:bodyPr/>
+          <a:lstStyle/>
+          <a:p>
+            <a:endParaRPr lang="en-US"/>
+          </a:p>
+        </p:txBody>
+      </p:sp>
+      <p:pic>
+        <p:nvPicPr>
+          <p:cNvPr id="7" name="Content Placeholder 6">
+            <a:extLst>
+              <a:ext uri="{FF2B5EF4-FFF2-40B4-BE49-F238E27FC236}">
+                <a16:creationId xmlns:a16="http://schemas.microsoft.com/office/drawing/2014/main" id="{E8E1833A-70B9-44A2-00DC-68DA2E994D0C}"/>
+              </a:ext>
+            </a:extLst>
+          </p:cNvPr>
+          <p:cNvPicPr>
+            <a:picLocks noGrp="1" noChangeAspect="1"/>
+          </p:cNvPicPr>
+          <p:nvPr>
+            <p:ph idx="1"/>
+          </p:nvPr>
+        </p:nvPicPr>
+        <p:blipFill>
+          <a:blip r:embed="rId2"/>
+          <a:stretch>
+            <a:fillRect/>
+          </a:stretch>
+        </p:blipFill>
+        <p:spPr>
+          <a:xfrm>
+            <a:off x="1823537" y="1412875"/>
+            <a:ext cx="8443325" cy="4595813"/>
+          </a:xfrm>
+          <a:prstGeom prst="rect">
+            <a:avLst/>
+          </a:prstGeom>
+        </p:spPr>
+      </p:pic>
+      <p:sp>
+        <p:nvSpPr>
+          <p:cNvPr id="4" name="Footer Placeholder 3">
+            <a:extLst>
+              <a:ext uri="{FF2B5EF4-FFF2-40B4-BE49-F238E27FC236}">
+                <a16:creationId xmlns:a16="http://schemas.microsoft.com/office/drawing/2014/main" id="{20FA7C82-E670-A733-1E19-ADFD1CF7B592}"/>
+              </a:ext>
+            </a:extLst>
+          </p:cNvPr>
+          <p:cNvSpPr>
+            <a:spLocks noGrp="1"/>
+          </p:cNvSpPr>
+          <p:nvPr>
+            <p:ph type="ftr" sz="quarter" idx="11"/>
+          </p:nvPr>
+        </p:nvSpPr>
+        <p:spPr/>
+        <p:txBody>
+          <a:bodyPr/>
+          <a:lstStyle/>
+          <a:p>
+            <a:r>
+              <a:rPr lang="en-US"/>
+              <a:t>Progress Update</a:t>
+            </a:r>
+            <a:endParaRPr lang="en-US" dirty="0"/>
+          </a:p>
+        </p:txBody>
+      </p:sp>
+      <p:sp>
+        <p:nvSpPr>
+          <p:cNvPr id="5" name="Slide Number Placeholder 4">
+            <a:extLst>
+              <a:ext uri="{FF2B5EF4-FFF2-40B4-BE49-F238E27FC236}">
+                <a16:creationId xmlns:a16="http://schemas.microsoft.com/office/drawing/2014/main" id="{4BC47DDF-594B-489E-BE2F-EED40F5C49D5}"/>
+              </a:ext>
+            </a:extLst>
+          </p:cNvPr>
+          <p:cNvSpPr>
+            <a:spLocks noGrp="1"/>
+          </p:cNvSpPr>
+          <p:nvPr>
+            <p:ph type="sldNum" sz="quarter" idx="12"/>
+          </p:nvPr>
+        </p:nvSpPr>
+        <p:spPr/>
+        <p:txBody>
+          <a:bodyPr/>
+          <a:lstStyle/>
+          <a:p>
+            <a:r>
+              <a:rPr lang="en-US"/>
+              <a:t>PAGE  </a:t>
+            </a:r>
+            <a:fld id="{93005692-73BE-493E-93AB-ECD6027A7652}" type="slidenum">
+              <a:rPr lang="en-US" smtClean="0"/>
+              <a:pPr/>
+              <a:t>38</a:t>
+            </a:fld>
+            <a:endParaRPr lang="en-US" dirty="0"/>
+          </a:p>
+        </p:txBody>
+      </p:sp>
+    </p:spTree>
+    <p:extLst>
+      <p:ext uri="{BB962C8B-B14F-4D97-AF65-F5344CB8AC3E}">
+        <p14:creationId xmlns:p14="http://schemas.microsoft.com/office/powerpoint/2010/main" val="1468328596"/>
+      </p:ext>
+    </p:extLst>
+  </p:cSld>
+  <p:clrMapOvr>
+    <a:masterClrMapping/>
+  </p:clrMapOvr>
+  <p:transition spd="slow">
+    <p:push dir="u"/>
+  </p:transition>
+</p:sld>
+</file>
+
+<file path=ppt/slides/slide39.xml><?xml version="1.0" encoding="utf-8"?>
+<p:sld xmlns:a="http://schemas.openxmlformats.org/drawingml/2006/main" xmlns:r="http://schemas.openxmlformats.org/officeDocument/2006/relationships" xmlns:p="http://schemas.openxmlformats.org/presentationml/2006/main">
+  <p:cSld>
+    <p:spTree>
+      <p:nvGrpSpPr>
+        <p:cNvPr id="1" name=""/>
+        <p:cNvGrpSpPr/>
+        <p:nvPr/>
+      </p:nvGrpSpPr>
+      <p:grpSpPr>
+        <a:xfrm>
+          <a:off x="0" y="0"/>
+          <a:ext cx="0" cy="0"/>
+          <a:chOff x="0" y="0"/>
+          <a:chExt cx="0" cy="0"/>
+        </a:xfrm>
+      </p:grpSpPr>
+      <p:sp>
+        <p:nvSpPr>
+          <p:cNvPr id="2" name="Title 1">
+            <a:extLst>
+              <a:ext uri="{FF2B5EF4-FFF2-40B4-BE49-F238E27FC236}">
+                <a16:creationId xmlns:a16="http://schemas.microsoft.com/office/drawing/2014/main" id="{1AA435E5-5EE7-0780-6F3C-1CD4022D7700}"/>
+              </a:ext>
+            </a:extLst>
+          </p:cNvPr>
+          <p:cNvSpPr>
+            <a:spLocks noGrp="1"/>
+          </p:cNvSpPr>
+          <p:nvPr>
+            <p:ph type="title"/>
+          </p:nvPr>
+        </p:nvSpPr>
+        <p:spPr/>
+        <p:txBody>
+          <a:bodyPr/>
+          <a:lstStyle/>
+          <a:p>
+            <a:endParaRPr lang="en-US"/>
+          </a:p>
+        </p:txBody>
+      </p:sp>
+      <p:pic>
+        <p:nvPicPr>
+          <p:cNvPr id="7" name="Content Placeholder 6">
+            <a:extLst>
+              <a:ext uri="{FF2B5EF4-FFF2-40B4-BE49-F238E27FC236}">
+                <a16:creationId xmlns:a16="http://schemas.microsoft.com/office/drawing/2014/main" id="{473525C9-F91A-CE4F-1A2C-836FB3414685}"/>
+              </a:ext>
+            </a:extLst>
+          </p:cNvPr>
+          <p:cNvPicPr>
+            <a:picLocks noGrp="1" noChangeAspect="1"/>
+          </p:cNvPicPr>
+          <p:nvPr>
+            <p:ph idx="1"/>
+          </p:nvPr>
+        </p:nvPicPr>
+        <p:blipFill>
+          <a:blip r:embed="rId2"/>
+          <a:stretch>
+            <a:fillRect/>
+          </a:stretch>
+        </p:blipFill>
+        <p:spPr>
+          <a:xfrm>
+            <a:off x="3145461" y="1412875"/>
+            <a:ext cx="5799478" cy="4595813"/>
+          </a:xfrm>
+          <a:prstGeom prst="rect">
+            <a:avLst/>
+          </a:prstGeom>
+        </p:spPr>
+      </p:pic>
+      <p:sp>
+        <p:nvSpPr>
+          <p:cNvPr id="4" name="Footer Placeholder 3">
+            <a:extLst>
+              <a:ext uri="{FF2B5EF4-FFF2-40B4-BE49-F238E27FC236}">
+                <a16:creationId xmlns:a16="http://schemas.microsoft.com/office/drawing/2014/main" id="{5009EC5C-696F-3B7C-7F6E-8BEDB3E48785}"/>
+              </a:ext>
+            </a:extLst>
+          </p:cNvPr>
+          <p:cNvSpPr>
+            <a:spLocks noGrp="1"/>
+          </p:cNvSpPr>
+          <p:nvPr>
+            <p:ph type="ftr" sz="quarter" idx="11"/>
+          </p:nvPr>
+        </p:nvSpPr>
+        <p:spPr/>
+        <p:txBody>
+          <a:bodyPr/>
+          <a:lstStyle/>
+          <a:p>
+            <a:r>
+              <a:rPr lang="en-US"/>
+              <a:t>Progress Update</a:t>
+            </a:r>
+            <a:endParaRPr lang="en-US" dirty="0"/>
+          </a:p>
+        </p:txBody>
+      </p:sp>
+      <p:sp>
+        <p:nvSpPr>
+          <p:cNvPr id="5" name="Slide Number Placeholder 4">
+            <a:extLst>
+              <a:ext uri="{FF2B5EF4-FFF2-40B4-BE49-F238E27FC236}">
+                <a16:creationId xmlns:a16="http://schemas.microsoft.com/office/drawing/2014/main" id="{FD60E1B2-2EBC-6B4E-321B-797725F156F2}"/>
+              </a:ext>
+            </a:extLst>
+          </p:cNvPr>
+          <p:cNvSpPr>
+            <a:spLocks noGrp="1"/>
+          </p:cNvSpPr>
+          <p:nvPr>
+            <p:ph type="sldNum" sz="quarter" idx="12"/>
+          </p:nvPr>
+        </p:nvSpPr>
+        <p:spPr/>
+        <p:txBody>
+          <a:bodyPr/>
+          <a:lstStyle/>
+          <a:p>
+            <a:r>
+              <a:rPr lang="en-US"/>
+              <a:t>PAGE  </a:t>
+            </a:r>
+            <a:fld id="{93005692-73BE-493E-93AB-ECD6027A7652}" type="slidenum">
+              <a:rPr lang="en-US" smtClean="0"/>
+              <a:pPr/>
+              <a:t>39</a:t>
+            </a:fld>
+            <a:endParaRPr lang="en-US" dirty="0"/>
+          </a:p>
+        </p:txBody>
+      </p:sp>
+    </p:spTree>
+    <p:extLst>
+      <p:ext uri="{BB962C8B-B14F-4D97-AF65-F5344CB8AC3E}">
+        <p14:creationId xmlns:p14="http://schemas.microsoft.com/office/powerpoint/2010/main" val="3383803343"/>
       </p:ext>
     </p:extLst>
   </p:cSld>
@@ -12895,7 +16884,7 @@
               <a:t>, Cc, </a:t>
             </a:r>
             <a:r>
-              <a:rPr lang="en-US"/>
+              <a:rPr lang="en-US" dirty="0" err="1"/>
               <a:t>f+g</a:t>
             </a:r>
             <a:endParaRPr lang="en-US" dirty="0"/>
